--- a/물리전자공학_3장_4강_전계에서의_표동과_이동도.pptx
+++ b/물리전자공학_3장_4강_전계에서의_표동과_이동도.pptx
@@ -36,6 +36,7 @@
     <p:sldId id="278" r:id="rId32"/>
     <p:sldId id="279" r:id="rId33"/>
     <p:sldId id="280" r:id="rId34"/>
+    <p:sldId id="320" r:id="rId74"/>
     <p:sldId id="318" r:id="rId72"/>
     <p:sldId id="319" r:id="rId73"/>
     <p:sldId id="281" r:id="rId35"/>
@@ -4775,7 +4776,7 @@
           <a:p>
             <a:r>
               <a:rPr lang="ko-KR" altLang="en-US"/>
-              <a:t>[보충] 사용자 요청 — 앞 장에서 한 줄로만 지나간 '열전자(hot electron)' 를 에너지 수지로 풀어 둔 장이다. 먼저 말을 정리한다 — 여기서 말하는 열전자는 뜨거운 금속에서 튀어나오는 열전자 방출(thermionic emission)이 아니라, 강전계에서 격자보다 뜨거워진 전자(hot carrier)를 가리킨다. 세 걸음으로 읽는다. ① 약한 전계 — 전자가 전계에서 받는 일률은 q𝓔v 이고, 산란 때마다 음향 포논에 에너지를 조금씩 넘긴다. 받는 몫이 작아 받는 즉시 넘길 수 있으므로 전자의 평균 에너지는 (3/2)kT 를 거의 벗어나지 않는다 — 전자온도 T_e 가 격자온도 T_L = 300 K 와 같고, 이때 t̄ 가 전계와 무관해 μ 가 상수이며 v_d = μ𝓔(옴의 법칙)가 성립한다. ② 강전계 — 10^3 ~ 10^4 V/cm 를 넘으면 q𝓔v 가 커져 음향 포논으로 넘기는 몫을 앞지른다. 남는 에너지가 전자 쪽에 쌓여 분포가 통째로 달궈지고, 그 분포를 유효온도로 적으면 T_e ≫ T_L (강한 전계에서는 수천 K 급)이 된다. 격자는 여전히 300 K 이고 전자만 뜨겁다는 점이 '열전자' 라는 이름의 뜻이다. 에너지가 오르면 산란이 잦아져 t̄ 가 줄고, 그래서 μ 가 더 이상 상수가 아니라 전계의 함수가 된다 — 옴의 법칙이 깨지는 까닭이 여기에 있다. ③ 광학 포논이 뚜껑 — Si 의 광학 포논 에너지는 약 63 meV(ħω)로 상온 kT = 26 meV 의 두 배가 넘어 약한 전계에서는 거의 내보내지 못한다. 그러나 전자가 그만한 에너지를 모으는 순간부터는 광학 포논을 아주 빠르게(약 0.1 ps 간격) 내보내며 에너지를 통째로 격자에 버린다. 얻는 즉시 버리므로 평균 에너지가 더 오르지 못하고, 그래서 표동속도가 v_s 에서 멈춘다 — Si 전자 약 1×10^7, 정공 약 0.8×10^7 cm/s(그림 3-24). 교재가 포화속도를 평균 열적 속도(√(3kT/m*) = 2.3×10^7 cm/s)와 같은 자릿수라고 적는 것은 크기의 어림일 뿐이고, 멈추는 원인은 광학 포논 방출이다(산란제한속도, scattering limited velocity). 한 줄로 — 정상상태는 '얻는 몫 q𝓔v = 포논으로 잃는 몫' 이 비기는 자리이고, 전계가 셀수록 그 자리가 높아지다가 광학 포논이 열리는 높이에서 더 오르지 못한다. 다음 장에서 이 열전자가 소자에 무엇을 남기는지 본다.</a:t>
+              <a:t>[보충] 사용자 요청 — 앞 장에서 말로 짚은 열전자를 이번에는 에너지가 들고 나는 그림으로 본다. 그림 읽는 법부터 — 가운데 막대가 전자의 평균 에너지(곧 T_e)이고, 왼쪽 가로 화살표가 전계에서 받는 몫 q𝓔v, 오른쪽 세로 화살표가 포논으로 격자에 버리는 몫이다. 화살표의 굵기가 그 몫의 크기다. 아래 회색 띠가 격자이고 늘 300 K 다. 세 걸음으로 읽는다. ① 약한 전계 — 전자가 전계에서 받는 일률은 q𝓔v 이고, 산란 때마다 음향 포논에 에너지를 조금씩 넘긴다. 받는 몫이 작아 받는 즉시 넘길 수 있으므로 전자의 평균 에너지는 (3/2)kT 를 거의 벗어나지 않는다 — 전자온도 T_e 가 격자온도 T_L = 300 K 와 같고, 이때 t̄ 가 전계와 무관해 μ 가 상수이며 v_d = μ𝓔(옴의 법칙)가 성립한다. ② 강전계 — 10^3 ~ 10^4 V/cm 를 넘으면 q𝓔v 가 커져 음향 포논으로 넘기는 몫을 앞지른다. 남는 에너지가 전자 쪽에 쌓여 분포가 통째로 달궈지고, 그 분포를 유효온도로 적으면 T_e ≫ T_L (강한 전계에서는 수천 K 급)이 된다. 격자는 여전히 300 K 이고 전자만 뜨겁다는 점이 '열전자' 라는 이름의 뜻이다. 에너지가 오르면 산란이 잦아져 t̄ 가 줄고, 그래서 μ 가 더 이상 상수가 아니라 전계의 함수가 된다 — 옴의 법칙이 깨지는 까닭이 여기에 있다. ③ 광학 포논이 뚜껑 — Si 의 광학 포논 에너지는 약 63 meV(ħω)로 상온 kT = 26 meV 의 두 배가 넘어 약한 전계에서는 거의 내보내지 못한다. 그러나 전자가 그만한 에너지를 모으는 순간부터는 광학 포논을 아주 빠르게(약 0.1 ps 간격) 내보내며 에너지를 통째로 격자에 버린다. 얻는 즉시 버리므로 평균 에너지가 더 오르지 못하고, 그래서 표동속도가 v_s 에서 멈춘다 — Si 전자 약 1×10^7, 정공 약 0.8×10^7 cm/s(그림 3-24). 교재가 포화속도를 평균 열적 속도(√(3kT/m*) = 2.3×10^7 cm/s)와 같은 자릿수라고 적는 것은 크기의 어림일 뿐이고, 멈추는 원인은 광학 포논 방출이다(산란제한속도, scattering limited velocity). 한 줄로 — 정상상태는 '얻는 몫 q𝓔v = 포논으로 잃는 몫' 이 비기는 자리이고, 전계가 셀수록 그 자리가 높아지다가 광학 포논이 열리는 높이에서 더 오르지 못한다. 다음 장에서 이 열전자가 소자에 무엇을 남기는지 본다.</a:t>
             </a:r>
           </a:p>
         </p:txBody>
@@ -4854,6 +4855,84 @@
             <a:r>
               <a:rPr lang="ko-KR" altLang="en-US"/>
               <a:t>[보충] 사용자 요청 — 열전자가 실제 소자에서 어떤 일을 하는지 셋으로 모았다. ① 속도 포화 — 앞 장에서 본 그대로, 얻은 에너지를 광학 포논으로 흘려보내 더 빨라지지 않는다(v_s ≈ 10^7 cm/s, 그림 3-24). 전류가 전압에 비례하지 않게 되고, 짧은 채널 소자의 구동전류 한계가 여기서 정해진다 — 0.1 μm 에 1 V 면 10^5 V/cm 이라 오늘날 소자는 늘 이 영역에서 동작한다. ② 충돌 이온화(impact ionization) — 전자가 에너지대역간격 E_g(Si 1.1 eV) 이상을 모으면 포논 대신 결합을 깨서 전자-정공쌍(EHP)을 새로 만든다. 새로 난 캐리어가 다시 가속되어 또 다른 쌍을 만드는 되먹임이 애벌랜치 증식이고, 이것이 pn 접합의 항복을 설명한다(5.4.2 절). 교재가 '또 다른 강전계효과' 로 드는 것이 이것이다. ③ 산화막으로 주입(hot carrier injection) — 채널의 열전자가 Si 와 SiO₂ 사이의 장벽(전자 약 3.1 eV)을 넘을 만큼 뜨거워지면 게이트 산화막으로 뛰어들어 그 안에 갇히거나 계면에 결함을 만든다. 갇힌 전하가 문턱전압을 밀고 이동도를 떨어뜨려 소자가 시간이 갈수록 느려지는데, 이것이 열전자 열화(HCI, hot carrier injection/degradation)다 — 드레인 쪽 전계가 가장 센 자리에서 주로 일어나 LDD(저농도 드레인) 구조 같은 완화책을 쓴다. ④ 하나 더 — GaAs 는 강전계에서 전자가 가벼운 Γ 계곡에서 무거운 상층 계곡(L)으로 옮겨 가 유효질량이 커지고 속도가 되레 줄어든다. 전계를 올렸는데 전류가 줄어드는 음성 미분저항이 생기고, 이것이 건(Gunn) 소자의 바탕이다(10 장). 세 가지 모두 뿌리는 하나 — 전자가 격자와의 열평형을 벗어났다는 것이다. 앞 장의 T_e ≫ T_L 이 어디로 이어지는지를 보여 주는 장이다.</a:t>
+            </a:r>
+          </a:p>
+        </p:txBody>
+      </p:sp>
+      <p:sp>
+        <p:nvSpPr>
+          <p:cNvPr id="4" name="Slide Number Placeholder 3"/>
+          <p:cNvSpPr>
+            <a:spLocks noGrp="1"/>
+          </p:cNvSpPr>
+          <p:nvPr>
+            <p:ph type="sldNum" sz="quarter" idx="10"/>
+          </p:nvPr>
+        </p:nvSpPr>
+        <p:spPr/>
+        <p:txBody>
+          <a:bodyPr/>
+          <a:lstStyle/>
+          <a:p>
+            <a:endParaRPr lang="ko-KR" altLang="en-US"/>
+          </a:p>
+        </p:txBody>
+      </p:sp>
+    </p:spTree>
+  </p:cSld>
+  <p:clrMapOvr>
+    <a:masterClrMapping/>
+  </p:clrMapOvr>
+</p:notes>
+</file>
+
+<file path=ppt/notesSlides/notesSlide57.xml><?xml version="1.0" encoding="utf-8"?>
+<p:notes xmlns:a="http://schemas.openxmlformats.org/drawingml/2006/main" xmlns:p="http://schemas.openxmlformats.org/presentationml/2006/main" xmlns:r="http://schemas.openxmlformats.org/officeDocument/2006/relationships">
+  <p:cSld>
+    <p:spTree>
+      <p:nvGrpSpPr>
+        <p:cNvPr id="1" name=""/>
+        <p:cNvGrpSpPr/>
+        <p:nvPr/>
+      </p:nvGrpSpPr>
+      <p:grpSpPr>
+        <a:xfrm>
+          <a:off x="0" y="0"/>
+          <a:ext cx="0" cy="0"/>
+          <a:chOff x="0" y="0"/>
+          <a:chExt cx="0" cy="0"/>
+        </a:xfrm>
+      </p:grpSpPr>
+      <p:sp>
+        <p:nvSpPr>
+          <p:cNvPr id="2" name="Slide Image Placeholder 1"/>
+          <p:cNvSpPr>
+            <a:spLocks noGrp="1"/>
+          </p:cNvSpPr>
+          <p:nvPr>
+            <p:ph type="sldImg" idx="2"/>
+          </p:nvPr>
+        </p:nvSpPr>
+        <p:spPr/>
+      </p:sp>
+      <p:sp>
+        <p:nvSpPr>
+          <p:cNvPr id="3" name="Notes Placeholder 2"/>
+          <p:cNvSpPr>
+            <a:spLocks noGrp="1"/>
+          </p:cNvSpPr>
+          <p:nvPr>
+            <p:ph type="body" idx="3" sz="quarter"/>
+          </p:nvPr>
+        </p:nvSpPr>
+        <p:spPr/>
+        <p:txBody>
+          <a:bodyPr/>
+          <a:lstStyle/>
+          <a:p>
+            <a:r>
+              <a:rPr lang="ko-KR" altLang="en-US"/>
+              <a:t>[보충] 사용자 요청 — 다음 장의 그림으로 가기 전에 말로만 한 번 짚는 장이다. 학생이 가장 자주 막히는 곳이 '전자의 온도' 라는 말 자체이므로 거기서 시작한다. ① 온도가 무엇을 적은 값인가 — 온도는 전자 하나의 에너지가 아니다. 1 cm³ 안의 수많은 전자가 어느 에너지에 얼마나 퍼져 있는지, 그 퍼짐의 넓이를 한 숫자로 적은 것이 온도다(3 강의 f(E) 곡선이 얼마나 완만한가로 생각하면 된다). 그래서 '전자가 뜨겁다' 는 말은 '전자 하나가 빠르다' 가 아니라 '전자 무리의 에너지 분포가 넓게 퍼졌다' 는 뜻이다. 평형에서는 전자도 결정도 같은 온도이고, 상온이면 둘 다 300 K 다. ② 두 온도 — T_L 은 격자온도(lattice temperature)로, 결정을 이루는 원자들이 제자리에서 떠는 정도를 적은 값이다. 상온이면 300 K 이고, 전계를 걸어도 원자는 전자보다 수십만 배 무거운 데다 받은 에너지를 결정 전체가 나눠 가지므로 거의 변하지 않는다 — 소자가 손으로 만질 만큼만 따뜻한 까닭이다. T_e 는 전자온도(electron temperature)로, 전자 무리의 분포가 퍼진 정도를 같은 방식으로 적은 값이다. 전계에서 받은 에너지를 포논으로 다 넘기지 못하면 분포가 넓어지므로 T_e 가 오른다. 두 온도를 따로 적는 까닭이 여기에 있다 — 전자와 격자가 더 이상 같은 온도가 아니기 때문이다(비평형). ③ 열전자 — 그래서 열전자는 'T_e 만 T_L 보다 훨씬 높아진 전자' 다. 결정은 300 K 그대로인데 전자만 수천 K 로 뜨겁다. 이름이 '열(熱)전자' 라서 뜨거운 금속에서 튀어나오는 열전자 방출(thermionic emission)과 헷갈리기 쉬운데, 전혀 다른 현상이다. 덧붙여 — 전자가 뜨거워지면 에너지가 큰 전자가 늘고, 에너지가 클수록 산란이 잦아져 평균 자유시간 t̄ 가 짧아진다. μ = qt̄/m* 이므로 μ 가 더 이상 상수가 아니라 전계에 따라 달라지고, 이것이 v_d = μ𝓔(옴의 법칙)가 깨지는 까닭이다. 다음 장에서 이 이야기를 에너지가 들고 나는 그림으로 다시 본다.</a:t>
             </a:r>
           </a:p>
         </p:txBody>
@@ -53510,8 +53589,8 @@
         </p:nvSpPr>
         <p:spPr>
           <a:xfrm>
-            <a:off x="500000" y="2705000"/>
-            <a:ext cx="966500" cy="240000"/>
+            <a:off x="440000" y="2705000"/>
+            <a:ext cx="1026500" cy="240000"/>
           </a:xfrm>
           <a:prstGeom prst="rect">
             <a:avLst/>
@@ -53537,7 +53616,7 @@
               <a:buNone/>
             </a:pPr>
             <a:r>
-              <a:rPr sz="1200" b="0" i="1" lang="ko-KR" altLang="en-US">
+              <a:rPr sz="1100" b="0" i="0" lang="ko-KR" altLang="en-US">
                 <a:solidFill>
                   <a:srgbClr val="203864"/>
                 </a:solidFill>
@@ -53545,29 +53624,7 @@
                 <a:ea typeface="맑은 고딕"/>
                 <a:cs typeface="맑은 고딕"/>
               </a:rPr>
-              <a:t>q</a:t>
-            </a:r>
-            <a:r>
-              <a:rPr sz="1200" b="0" i="0" lang="ko-KR" altLang="en-US">
-                <a:solidFill>
-                  <a:srgbClr val="203864"/>
-                </a:solidFill>
-                <a:latin typeface="Cambria"/>
-                <a:ea typeface="Cambria"/>
-                <a:cs typeface="Cambria"/>
-              </a:rPr>
-              <a:t>𝓔</a:t>
-            </a:r>
-            <a:r>
-              <a:rPr sz="1200" b="0" i="1" lang="ko-KR" altLang="en-US">
-                <a:solidFill>
-                  <a:srgbClr val="203864"/>
-                </a:solidFill>
-                <a:latin typeface="맑은 고딕"/>
-                <a:ea typeface="맑은 고딕"/>
-                <a:cs typeface="맑은 고딕"/>
-              </a:rPr>
-              <a:t>v</a:t>
+              <a:t>전계가 줌</a:t>
             </a:r>
           </a:p>
         </p:txBody>
@@ -53884,8 +53941,8 @@
         </p:nvSpPr>
         <p:spPr>
           <a:xfrm>
-            <a:off x="3393500" y="2705000"/>
-            <a:ext cx="966500" cy="240000"/>
+            <a:off x="3333500" y="2705000"/>
+            <a:ext cx="1026500" cy="240000"/>
           </a:xfrm>
           <a:prstGeom prst="rect">
             <a:avLst/>
@@ -53911,7 +53968,7 @@
               <a:buNone/>
             </a:pPr>
             <a:r>
-              <a:rPr sz="1200" b="0" i="1" lang="ko-KR" altLang="en-US">
+              <a:rPr sz="1100" b="0" i="0" lang="ko-KR" altLang="en-US">
                 <a:solidFill>
                   <a:srgbClr val="203864"/>
                 </a:solidFill>
@@ -53919,29 +53976,7 @@
                 <a:ea typeface="맑은 고딕"/>
                 <a:cs typeface="맑은 고딕"/>
               </a:rPr>
-              <a:t>q</a:t>
-            </a:r>
-            <a:r>
-              <a:rPr sz="1200" b="0" i="0" lang="ko-KR" altLang="en-US">
-                <a:solidFill>
-                  <a:srgbClr val="203864"/>
-                </a:solidFill>
-                <a:latin typeface="Cambria"/>
-                <a:ea typeface="Cambria"/>
-                <a:cs typeface="Cambria"/>
-              </a:rPr>
-              <a:t>𝓔</a:t>
-            </a:r>
-            <a:r>
-              <a:rPr sz="1200" b="0" i="1" lang="ko-KR" altLang="en-US">
-                <a:solidFill>
-                  <a:srgbClr val="203864"/>
-                </a:solidFill>
-                <a:latin typeface="맑은 고딕"/>
-                <a:ea typeface="맑은 고딕"/>
-                <a:cs typeface="맑은 고딕"/>
-              </a:rPr>
-              <a:t>v</a:t>
+              <a:t>전계가 줌</a:t>
             </a:r>
           </a:p>
         </p:txBody>
@@ -54258,8 +54293,8 @@
         </p:nvSpPr>
         <p:spPr>
           <a:xfrm>
-            <a:off x="6287000" y="2705000"/>
-            <a:ext cx="966500" cy="240000"/>
+            <a:off x="6227000" y="2705000"/>
+            <a:ext cx="1026500" cy="240000"/>
           </a:xfrm>
           <a:prstGeom prst="rect">
             <a:avLst/>
@@ -54285,7 +54320,7 @@
               <a:buNone/>
             </a:pPr>
             <a:r>
-              <a:rPr sz="1200" b="0" i="1" lang="ko-KR" altLang="en-US">
+              <a:rPr sz="1100" b="0" i="0" lang="ko-KR" altLang="en-US">
                 <a:solidFill>
                   <a:srgbClr val="203864"/>
                 </a:solidFill>
@@ -54293,29 +54328,7 @@
                 <a:ea typeface="맑은 고딕"/>
                 <a:cs typeface="맑은 고딕"/>
               </a:rPr>
-              <a:t>q</a:t>
-            </a:r>
-            <a:r>
-              <a:rPr sz="1200" b="0" i="0" lang="ko-KR" altLang="en-US">
-                <a:solidFill>
-                  <a:srgbClr val="203864"/>
-                </a:solidFill>
-                <a:latin typeface="Cambria"/>
-                <a:ea typeface="Cambria"/>
-                <a:cs typeface="Cambria"/>
-              </a:rPr>
-              <a:t>𝓔</a:t>
-            </a:r>
-            <a:r>
-              <a:rPr sz="1200" b="0" i="1" lang="ko-KR" altLang="en-US">
-                <a:solidFill>
-                  <a:srgbClr val="203864"/>
-                </a:solidFill>
-                <a:latin typeface="맑은 고딕"/>
-                <a:ea typeface="맑은 고딕"/>
-                <a:cs typeface="맑은 고딕"/>
-              </a:rPr>
-              <a:t>v</a:t>
+              <a:t>전계가 줌</a:t>
             </a:r>
           </a:p>
         </p:txBody>
@@ -54503,7 +54516,7 @@
                 <a:ea typeface="맑은 고딕"/>
                 <a:cs typeface="맑은 고딕"/>
               </a:rPr>
-              <a:t>T</a:t>
+              <a:t>전자온도 T</a:t>
             </a:r>
             <a:r>
               <a:rPr sz="1300" b="0" i="1" baseline="-25000" lang="ko-KR" altLang="en-US">
@@ -54525,7 +54538,7 @@
                 <a:ea typeface="맑은 고딕"/>
                 <a:cs typeface="맑은 고딕"/>
               </a:rPr>
-              <a:t> = T</a:t>
+              <a:t> = 격자온도 T</a:t>
             </a:r>
             <a:r>
               <a:rPr sz="1300" b="0" i="1" baseline="-25000" lang="ko-KR" altLang="en-US">
@@ -54538,41 +54551,30 @@
               </a:rPr>
               <a:t>L</a:t>
             </a:r>
+          </a:p>
+          <a:p>
+            <a:pPr algn="ctr" eaLnBrk="0">
+              <a:lnSpc>
+                <a:spcPct val="95000"/>
+              </a:lnSpc>
+              <a:spcBef>
+                <a:spcPts val="0"/>
+              </a:spcBef>
+              <a:spcAft>
+                <a:spcPts val="0"/>
+              </a:spcAft>
+              <a:buNone/>
+            </a:pPr>
             <a:r>
               <a:rPr sz="1300" b="0" i="0" lang="ko-KR" altLang="en-US">
                 <a:solidFill>
-                  <a:srgbClr val="1A1A1A"/>
-                </a:solidFill>
-                <a:latin typeface="맑은 고딕"/>
-                <a:ea typeface="맑은 고딕"/>
-                <a:cs typeface="맑은 고딕"/>
-              </a:rPr>
-              <a:t> = 300 K</a:t>
-            </a:r>
-          </a:p>
-          <a:p>
-            <a:pPr algn="ctr" eaLnBrk="0">
-              <a:lnSpc>
-                <a:spcPct val="95000"/>
-              </a:lnSpc>
-              <a:spcBef>
-                <a:spcPts val="0"/>
-              </a:spcBef>
-              <a:spcAft>
-                <a:spcPts val="0"/>
-              </a:spcAft>
-              <a:buNone/>
-            </a:pPr>
-            <a:r>
-              <a:rPr sz="1300" b="0" i="0" lang="ko-KR" altLang="en-US">
-                <a:solidFill>
                   <a:srgbClr val="595959"/>
                 </a:solidFill>
                 <a:latin typeface="맑은 고딕"/>
                 <a:ea typeface="맑은 고딕"/>
                 <a:cs typeface="맑은 고딕"/>
               </a:rPr>
-              <a:t>μ 가 상수 — 옴의 법칙</a:t>
+              <a:t>= 300 K · 옴의 법칙 성립</a:t>
             </a:r>
           </a:p>
         </p:txBody>
@@ -54642,54 +54644,32 @@
                 <a:ea typeface="맑은 고딕"/>
                 <a:cs typeface="맑은 고딕"/>
               </a:rPr>
-              <a:t> ≫ T</a:t>
-            </a:r>
-            <a:r>
-              <a:rPr sz="1300" b="0" i="1" baseline="-25000" lang="ko-KR" altLang="en-US">
-                <a:solidFill>
-                  <a:srgbClr val="1A1A1A"/>
-                </a:solidFill>
-                <a:latin typeface="맑은 고딕"/>
-                <a:ea typeface="맑은 고딕"/>
-                <a:cs typeface="맑은 고딕"/>
-              </a:rPr>
-              <a:t>L</a:t>
-            </a:r>
+              <a:t> 가 수천 K 까지 오름</a:t>
+            </a:r>
+          </a:p>
+          <a:p>
+            <a:pPr algn="ctr" eaLnBrk="0">
+              <a:lnSpc>
+                <a:spcPct val="95000"/>
+              </a:lnSpc>
+              <a:spcBef>
+                <a:spcPts val="0"/>
+              </a:spcBef>
+              <a:spcAft>
+                <a:spcPts val="0"/>
+              </a:spcAft>
+              <a:buNone/>
+            </a:pPr>
             <a:r>
               <a:rPr sz="1300" b="0" i="0" lang="ko-KR" altLang="en-US">
                 <a:solidFill>
-                  <a:srgbClr val="1A1A1A"/>
-                </a:solidFill>
-                <a:latin typeface="맑은 고딕"/>
-                <a:ea typeface="맑은 고딕"/>
-                <a:cs typeface="맑은 고딕"/>
-              </a:rPr>
-              <a:t> (수천 K)</a:t>
-            </a:r>
-          </a:p>
-          <a:p>
-            <a:pPr algn="ctr" eaLnBrk="0">
-              <a:lnSpc>
-                <a:spcPct val="95000"/>
-              </a:lnSpc>
-              <a:spcBef>
-                <a:spcPts val="0"/>
-              </a:spcBef>
-              <a:spcAft>
-                <a:spcPts val="0"/>
-              </a:spcAft>
-              <a:buNone/>
-            </a:pPr>
-            <a:r>
-              <a:rPr sz="1300" b="0" i="0" lang="ko-KR" altLang="en-US">
-                <a:solidFill>
                   <a:srgbClr val="595959"/>
                 </a:solidFill>
                 <a:latin typeface="맑은 고딕"/>
                 <a:ea typeface="맑은 고딕"/>
                 <a:cs typeface="맑은 고딕"/>
               </a:rPr>
-              <a:t>전자만 뜨거워짐</a:t>
+              <a:t>격자는 그대로 300 K</a:t>
             </a:r>
           </a:p>
         </p:txBody>
@@ -54737,7 +54717,7 @@
                 <a:ea typeface="맑은 고딕"/>
                 <a:cs typeface="맑은 고딕"/>
               </a:rPr>
-              <a:t>더 못 뜨거워짐 → v</a:t>
+              <a:t>T</a:t>
             </a:r>
             <a:r>
               <a:rPr sz="1300" b="0" i="1" baseline="-25000" lang="ko-KR" altLang="en-US">
@@ -54748,7 +54728,18 @@
                 <a:ea typeface="맑은 고딕"/>
                 <a:cs typeface="맑은 고딕"/>
               </a:rPr>
-              <a:t>s</a:t>
+              <a:t>e</a:t>
+            </a:r>
+            <a:r>
+              <a:rPr sz="1300" b="0" i="0" lang="ko-KR" altLang="en-US">
+                <a:solidFill>
+                  <a:srgbClr val="1A1A1A"/>
+                </a:solidFill>
+                <a:latin typeface="맑은 고딕"/>
+                <a:ea typeface="맑은 고딕"/>
+                <a:cs typeface="맑은 고딕"/>
+              </a:rPr>
+              <a:t> 가 더는 안 오름</a:t>
             </a:r>
           </a:p>
           <a:p>
@@ -54773,7 +54764,7 @@
                 <a:ea typeface="맑은 고딕"/>
                 <a:cs typeface="맑은 고딕"/>
               </a:rPr>
-              <a:t>≈ 10</a:t>
+              <a:t>속도도 10</a:t>
             </a:r>
             <a:r>
               <a:rPr sz="1300" b="0" i="0" baseline="30000" lang="ko-KR" altLang="en-US">
@@ -54795,7 +54786,7 @@
                 <a:ea typeface="맑은 고딕"/>
                 <a:cs typeface="맑은 고딕"/>
               </a:rPr>
-              <a:t> cm/s 에서 포화</a:t>
+              <a:t> cm/s 에서 멈춤</a:t>
             </a:r>
           </a:p>
         </p:txBody>
@@ -54843,7 +54834,29 @@
                 <a:ea typeface="맑은 고딕"/>
                 <a:cs typeface="맑은 고딕"/>
               </a:rPr>
-              <a:t>얻는 몫과 포논으로 잃는 몫이 비기는 자리가 정상상태 — 전계가 셀수록 그 자리가 높아진다</a:t>
+              <a:t>막대 = 전자의 평균 에너지 · 가로 화살표 = 전계가 주는 몫(q</a:t>
+            </a:r>
+            <a:r>
+              <a:rPr sz="1400" b="0" i="0" lang="ko-KR" altLang="en-US">
+                <a:solidFill>
+                  <a:srgbClr val="595959"/>
+                </a:solidFill>
+                <a:latin typeface="Cambria"/>
+                <a:ea typeface="Cambria"/>
+                <a:cs typeface="Cambria"/>
+              </a:rPr>
+              <a:t>𝓔</a:t>
+            </a:r>
+            <a:r>
+              <a:rPr sz="1400" b="0" i="0" lang="ko-KR" altLang="en-US">
+                <a:solidFill>
+                  <a:srgbClr val="595959"/>
+                </a:solidFill>
+                <a:latin typeface="맑은 고딕"/>
+                <a:ea typeface="맑은 고딕"/>
+                <a:cs typeface="맑은 고딕"/>
+              </a:rPr>
+              <a:t>v) · 세로 = 포논으로 버리는 몫</a:t>
             </a:r>
           </a:p>
         </p:txBody>
@@ -54896,7 +54909,7 @@
                 <a:ea typeface="맑은 고딕"/>
                 <a:cs typeface="맑은 고딕"/>
               </a:rPr>
-              <a:t>열전자 — 격자(300 K)와 열평형을 벗어난 전자</a:t>
+              <a:t>전계가 주는 몫 &gt; 포논으로 버리는 몫 이면 에너지가 쌓임</a:t>
             </a:r>
           </a:p>
           <a:p>
@@ -54926,7 +54939,7 @@
                 <a:ea typeface="맑은 고딕"/>
                 <a:cs typeface="맑은 고딕"/>
               </a:rPr>
-              <a:t>약한 전계에선 받는 즉시 음향 포논으로 넘겨 </a:t>
+              <a:t>쌓인 만큼 전자만 뜨거워짐 — </a:t>
             </a:r>
             <a:r>
               <a:rPr sz="2200" b="0" i="0" lang="ko-KR" altLang="en-US">
@@ -54959,7 +54972,7 @@
                 <a:ea typeface="맑은 고딕"/>
                 <a:cs typeface="맑은 고딕"/>
               </a:rPr>
-              <a:t> = T</a:t>
+              <a:t> ≫ T</a:t>
             </a:r>
             <a:r>
               <a:rPr sz="2200" b="0" i="1" baseline="-25000" lang="ko-KR" altLang="en-US">
@@ -55000,62 +55013,7 @@
                 <a:ea typeface="맑은 고딕"/>
                 <a:cs typeface="맑은 고딕"/>
               </a:rPr>
-              <a:t>강전계에선 넘기지 못해 </a:t>
-            </a:r>
-            <a:r>
-              <a:rPr sz="2200" b="0" i="0" lang="ko-KR" altLang="en-US">
-                <a:solidFill>
-                  <a:srgbClr val="1A1A1A"/>
-                </a:solidFill>
-                <a:latin typeface="맑은 고딕"/>
-                <a:ea typeface="맑은 고딕"/>
-                <a:cs typeface="맑은 고딕"/>
-              </a:rPr>
-              <a:t>T</a:t>
-            </a:r>
-            <a:r>
-              <a:rPr sz="2200" b="0" i="1" baseline="-25000" lang="ko-KR" altLang="en-US">
-                <a:solidFill>
-                  <a:srgbClr val="1A1A1A"/>
-                </a:solidFill>
-                <a:latin typeface="맑은 고딕"/>
-                <a:ea typeface="맑은 고딕"/>
-                <a:cs typeface="맑은 고딕"/>
-              </a:rPr>
-              <a:t>e</a:t>
-            </a:r>
-            <a:r>
-              <a:rPr sz="2200" b="0" i="0" lang="ko-KR" altLang="en-US">
-                <a:solidFill>
-                  <a:srgbClr val="1A1A1A"/>
-                </a:solidFill>
-                <a:latin typeface="맑은 고딕"/>
-                <a:ea typeface="맑은 고딕"/>
-                <a:cs typeface="맑은 고딕"/>
-              </a:rPr>
-              <a:t> ≫ T</a:t>
-            </a:r>
-            <a:r>
-              <a:rPr sz="2200" b="0" i="1" baseline="-25000" lang="ko-KR" altLang="en-US">
-                <a:solidFill>
-                  <a:srgbClr val="1A1A1A"/>
-                </a:solidFill>
-                <a:latin typeface="맑은 고딕"/>
-                <a:ea typeface="맑은 고딕"/>
-                <a:cs typeface="맑은 고딕"/>
-              </a:rPr>
-              <a:t>L</a:t>
-            </a:r>
-            <a:r>
-              <a:rPr sz="2200" b="0" i="0" lang="ko-KR" altLang="en-US">
-                <a:solidFill>
-                  <a:srgbClr val="1A1A1A"/>
-                </a:solidFill>
-                <a:latin typeface="맑은 고딕"/>
-                <a:ea typeface="맑은 고딕"/>
-                <a:cs typeface="맑은 고딕"/>
-              </a:rPr>
-              <a:t> — 광학 포논이 뚜껑</a:t>
+              <a:t>광학 포논이 열리면 더 못 뜨거워짐 → 속도 포화</a:t>
             </a:r>
           </a:p>
         </p:txBody>
@@ -56640,7 +56598,7 @@
                 <a:ea typeface="맑은 고딕"/>
                 <a:cs typeface="맑은 고딕"/>
               </a:rPr>
-              <a:t>갇힌 전하가 소자를 늙힘</a:t>
+              <a:t>산화막에 갇힌 전하가</a:t>
             </a:r>
           </a:p>
           <a:p>
@@ -56665,7 +56623,7 @@
                 <a:ea typeface="맑은 고딕"/>
                 <a:cs typeface="맑은 고딕"/>
               </a:rPr>
-              <a:t>열전자 열화 — HCI</a:t>
+              <a:t>문턱전압을 밀어 소자가 늙음</a:t>
             </a:r>
           </a:p>
         </p:txBody>
@@ -56713,7 +56671,7 @@
                 <a:ea typeface="맑은 고딕"/>
                 <a:cs typeface="맑은 고딕"/>
               </a:rPr>
-              <a:t>GaAs 는 전자가 무거운 계곡으로 옮겨 가 속도가 되레 줄어든다 — 음성저항(10 장)</a:t>
+              <a:t>HCI = Hot Carrier Injection(열전자 주입) · GaAs 는 속도가 되레 줄어듦 — 음성저항(10 장)</a:t>
             </a:r>
           </a:p>
         </p:txBody>
@@ -56826,7 +56784,844 @@
                 <a:ea typeface="맑은 고딕"/>
                 <a:cs typeface="맑은 고딕"/>
               </a:rPr>
-              <a:t>장벽을 넘어 산화막에 갇히면 소자가 늙음 — HCI 열화</a:t>
+              <a:t>산화막으로 뛰어들어 갇히면 소자가 늙음 — HCI 열화</a:t>
+            </a:r>
+          </a:p>
+        </p:txBody>
+      </p:sp>
+    </p:spTree>
+  </p:cSld>
+  <p:clrMapOvr>
+    <a:masterClrMapping/>
+  </p:clrMapOvr>
+</p:sld>
+</file>
+
+<file path=ppt/slides/slide65.xml><?xml version="1.0" encoding="utf-8"?>
+<p:sld xmlns:a="http://schemas.openxmlformats.org/drawingml/2006/main" xmlns:p="http://schemas.openxmlformats.org/presentationml/2006/main" xmlns:r="http://schemas.openxmlformats.org/officeDocument/2006/relationships">
+  <p:cSld>
+    <p:spTree>
+      <p:nvGrpSpPr>
+        <p:cNvPr id="1" name=""/>
+        <p:cNvGrpSpPr/>
+        <p:nvPr/>
+      </p:nvGrpSpPr>
+      <p:grpSpPr/>
+      <p:sp>
+        <p:nvSpPr>
+          <p:cNvPr id="2" name="Title 1"/>
+          <p:cNvSpPr>
+            <a:spLocks noGrp="1"/>
+          </p:cNvSpPr>
+          <p:nvPr>
+            <p:ph type="title"/>
+          </p:nvPr>
+        </p:nvSpPr>
+        <p:spPr>
+          <a:xfrm>
+            <a:off x="274320" y="118872"/>
+            <a:ext cx="8595360" cy="749808"/>
+          </a:xfrm>
+        </p:spPr>
+        <p:txBody>
+          <a:bodyPr wrap="square"/>
+          <a:lstStyle/>
+          <a:p>
+            <a:r>
+              <a:rPr sz="3000" b="1" i="0" lang="ko-KR" altLang="en-US">
+                <a:solidFill>
+                  <a:srgbClr val="203864"/>
+                </a:solidFill>
+                <a:latin typeface="돋움"/>
+                <a:ea typeface="돋움"/>
+                <a:cs typeface="돋움"/>
+              </a:rPr>
+              <a:t>[보충] 열전자를 말로 먼저</a:t>
+            </a:r>
+          </a:p>
+        </p:txBody>
+      </p:sp>
+      <p:sp>
+        <p:nvSpPr>
+          <p:cNvPr id="3" name="TextBox 2"/>
+          <p:cNvSpPr txBox="1"/>
+          <p:nvPr/>
+        </p:nvSpPr>
+        <p:spPr>
+          <a:xfrm>
+            <a:off x="457200" y="6382512"/>
+            <a:ext cx="4206240" cy="329184"/>
+          </a:xfrm>
+          <a:prstGeom prst="rect">
+            <a:avLst/>
+          </a:prstGeom>
+          <a:noFill/>
+        </p:spPr>
+        <p:txBody>
+          <a:bodyPr wrap="none" lIns="0" rIns="0" tIns="0" bIns="0">
+            <a:spAutoFit/>
+          </a:bodyPr>
+          <a:lstStyle/>
+          <a:p>
+            <a:pPr algn="l"/>
+            <a:r>
+              <a:rPr sz="1600" lang="ko-KR" altLang="en-US">
+                <a:solidFill>
+                  <a:srgbClr val="6E6E6E"/>
+                </a:solidFill>
+                <a:latin typeface="Arial"/>
+                <a:ea typeface="맑은 고딕"/>
+                <a:cs typeface="맑은 고딕"/>
+              </a:rPr>
+              <a:t>Generated by Claude</a:t>
+            </a:r>
+          </a:p>
+        </p:txBody>
+      </p:sp>
+      <p:sp>
+        <p:nvSpPr>
+          <p:cNvPr id="4" name="TextBox 3"/>
+          <p:cNvSpPr txBox="1"/>
+          <p:nvPr/>
+        </p:nvSpPr>
+        <p:spPr>
+          <a:xfrm>
+            <a:off x="475488" y="877824"/>
+            <a:ext cx="8229600" cy="310896"/>
+          </a:xfrm>
+          <a:prstGeom prst="rect">
+            <a:avLst/>
+          </a:prstGeom>
+          <a:noFill/>
+        </p:spPr>
+        <p:txBody>
+          <a:bodyPr wrap="square" lIns="0" rIns="0" tIns="0" bIns="0" anchor="t">
+            <a:spAutoFit/>
+          </a:bodyPr>
+          <a:lstStyle/>
+          <a:p>
+            <a:pPr algn="l" eaLnBrk="0">
+              <a:lnSpc>
+                <a:spcPct val="95000"/>
+              </a:lnSpc>
+              <a:spcBef>
+                <a:spcPts val="0"/>
+              </a:spcBef>
+              <a:spcAft>
+                <a:spcPts val="0"/>
+              </a:spcAft>
+              <a:buNone/>
+            </a:pPr>
+            <a:r>
+              <a:rPr sz="2100" b="0" i="0" lang="ko-KR" altLang="en-US">
+                <a:solidFill>
+                  <a:srgbClr val="595959"/>
+                </a:solidFill>
+                <a:latin typeface="맑은 고딕"/>
+                <a:ea typeface="맑은 고딕"/>
+                <a:cs typeface="맑은 고딕"/>
+              </a:rPr>
+              <a:t>[보충] 전자온도 T</a:t>
+            </a:r>
+            <a:r>
+              <a:rPr sz="2100" b="0" i="1" baseline="-25000" lang="ko-KR" altLang="en-US">
+                <a:solidFill>
+                  <a:srgbClr val="595959"/>
+                </a:solidFill>
+                <a:latin typeface="맑은 고딕"/>
+                <a:ea typeface="맑은 고딕"/>
+                <a:cs typeface="맑은 고딕"/>
+              </a:rPr>
+              <a:t>e</a:t>
+            </a:r>
+            <a:r>
+              <a:rPr sz="2100" b="0" i="0" lang="ko-KR" altLang="en-US">
+                <a:solidFill>
+                  <a:srgbClr val="595959"/>
+                </a:solidFill>
+                <a:latin typeface="맑은 고딕"/>
+                <a:ea typeface="맑은 고딕"/>
+                <a:cs typeface="맑은 고딕"/>
+              </a:rPr>
+              <a:t> 와 격자온도 T</a:t>
+            </a:r>
+            <a:r>
+              <a:rPr sz="2100" b="0" i="1" baseline="-25000" lang="ko-KR" altLang="en-US">
+                <a:solidFill>
+                  <a:srgbClr val="595959"/>
+                </a:solidFill>
+                <a:latin typeface="맑은 고딕"/>
+                <a:ea typeface="맑은 고딕"/>
+                <a:cs typeface="맑은 고딕"/>
+              </a:rPr>
+              <a:t>L</a:t>
+            </a:r>
+            <a:r>
+              <a:rPr sz="2100" b="0" i="0" lang="ko-KR" altLang="en-US">
+                <a:solidFill>
+                  <a:srgbClr val="595959"/>
+                </a:solidFill>
+                <a:latin typeface="맑은 고딕"/>
+                <a:ea typeface="맑은 고딕"/>
+                <a:cs typeface="맑은 고딕"/>
+              </a:rPr>
+              <a:t> 이 무엇인지부터</a:t>
+            </a:r>
+          </a:p>
+        </p:txBody>
+      </p:sp>
+      <p:sp>
+        <p:nvSpPr>
+          <p:cNvPr id="10" name="Card 10"/>
+          <p:cNvSpPr/>
+          <p:nvPr/>
+        </p:nvSpPr>
+        <p:spPr>
+          <a:xfrm>
+            <a:off x="457200" y="1280160"/>
+            <a:ext cx="8229600" cy="1578864"/>
+          </a:xfrm>
+          <a:prstGeom prst="roundRect">
+            <a:avLst>
+              <a:gd name="adj" fmla="val 8000"/>
+            </a:avLst>
+          </a:prstGeom>
+          <a:solidFill>
+            <a:srgbClr val="EEF3FA"/>
+          </a:solidFill>
+          <a:ln>
+            <a:noFill/>
+          </a:ln>
+          <a:effectLst/>
+        </p:spPr>
+        <p:txBody>
+          <a:bodyPr rtlCol="0" anchor="ctr" wrap="square" lIns="54864" rIns="54864" tIns="27432" bIns="27432"/>
+          <a:lstStyle/>
+          <a:p>
+            <a:pPr algn="ctr"/>
+          </a:p>
+        </p:txBody>
+      </p:sp>
+      <p:sp>
+        <p:nvSpPr>
+          <p:cNvPr id="11" name="Oval 11"/>
+          <p:cNvSpPr/>
+          <p:nvPr/>
+        </p:nvSpPr>
+        <p:spPr>
+          <a:xfrm>
+            <a:off x="630936" y="1859280"/>
+            <a:ext cx="420624" cy="420624"/>
+          </a:xfrm>
+          <a:prstGeom prst="ellipse">
+            <a:avLst/>
+          </a:prstGeom>
+          <a:solidFill>
+            <a:srgbClr val="203864"/>
+          </a:solidFill>
+          <a:ln>
+            <a:noFill/>
+          </a:ln>
+          <a:effectLst/>
+        </p:spPr>
+        <p:txBody>
+          <a:bodyPr rtlCol="0" anchor="ctr" wrap="square" lIns="54864" rIns="54864" tIns="27432" bIns="27432"/>
+          <a:lstStyle/>
+          <a:p>
+            <a:pPr algn="ctr" eaLnBrk="0">
+              <a:lnSpc>
+                <a:spcPct val="95000"/>
+              </a:lnSpc>
+              <a:spcBef>
+                <a:spcPts val="0"/>
+              </a:spcBef>
+              <a:spcAft>
+                <a:spcPts val="0"/>
+              </a:spcAft>
+              <a:buNone/>
+            </a:pPr>
+            <a:r>
+              <a:rPr sz="2200" b="1" i="0" lang="ko-KR" altLang="en-US">
+                <a:solidFill>
+                  <a:srgbClr val="FFFFFF"/>
+                </a:solidFill>
+                <a:latin typeface="맑은 고딕"/>
+                <a:ea typeface="맑은 고딕"/>
+                <a:cs typeface="맑은 고딕"/>
+              </a:rPr>
+              <a:t>1</a:t>
+            </a:r>
+          </a:p>
+        </p:txBody>
+      </p:sp>
+      <p:sp>
+        <p:nvSpPr>
+          <p:cNvPr id="12" name="TextBox 12"/>
+          <p:cNvSpPr txBox="1"/>
+          <p:nvPr/>
+        </p:nvSpPr>
+        <p:spPr>
+          <a:xfrm>
+            <a:off x="1188720" y="1335024"/>
+            <a:ext cx="7360920" cy="1469135"/>
+          </a:xfrm>
+          <a:prstGeom prst="rect">
+            <a:avLst/>
+          </a:prstGeom>
+          <a:noFill/>
+        </p:spPr>
+        <p:txBody>
+          <a:bodyPr wrap="square" lIns="0" rIns="0" tIns="0" bIns="0" anchor="ctr">
+            <a:spAutoFit/>
+          </a:bodyPr>
+          <a:lstStyle/>
+          <a:p>
+            <a:pPr algn="l" eaLnBrk="0">
+              <a:lnSpc>
+                <a:spcPct val="95000"/>
+              </a:lnSpc>
+              <a:spcBef>
+                <a:spcPts val="0"/>
+              </a:spcBef>
+              <a:spcAft>
+                <a:spcPts val="300"/>
+              </a:spcAft>
+              <a:buNone/>
+            </a:pPr>
+            <a:r>
+              <a:rPr sz="2200" b="1" i="0" lang="ko-KR" altLang="en-US">
+                <a:solidFill>
+                  <a:srgbClr val="203864"/>
+                </a:solidFill>
+                <a:latin typeface="맑은 고딕"/>
+                <a:ea typeface="맑은 고딕"/>
+                <a:cs typeface="맑은 고딕"/>
+              </a:rPr>
+              <a:t>온도는 '얼마나 들떠 있나' 를 적은 숫자</a:t>
+            </a:r>
+          </a:p>
+          <a:p>
+            <a:pPr algn="l" eaLnBrk="0">
+              <a:lnSpc>
+                <a:spcPct val="95000"/>
+              </a:lnSpc>
+              <a:spcBef>
+                <a:spcPts val="0"/>
+              </a:spcBef>
+              <a:spcAft>
+                <a:spcPts val="100"/>
+              </a:spcAft>
+              <a:buNone/>
+            </a:pPr>
+            <a:r>
+              <a:rPr sz="2100" b="0" i="0" lang="ko-KR" altLang="en-US">
+                <a:solidFill>
+                  <a:srgbClr val="1A1A1A"/>
+                </a:solidFill>
+                <a:latin typeface="맑은 고딕"/>
+                <a:ea typeface="맑은 고딕"/>
+                <a:cs typeface="맑은 고딕"/>
+              </a:rPr>
+              <a:t>전자 하나가 아니라 전자 무리가 얼마나 퍼져 있나를 적는다</a:t>
+            </a:r>
+          </a:p>
+          <a:p>
+            <a:pPr algn="l" eaLnBrk="0">
+              <a:lnSpc>
+                <a:spcPct val="95000"/>
+              </a:lnSpc>
+              <a:spcBef>
+                <a:spcPts val="0"/>
+              </a:spcBef>
+              <a:spcAft>
+                <a:spcPts val="100"/>
+              </a:spcAft>
+              <a:buNone/>
+            </a:pPr>
+            <a:r>
+              <a:rPr sz="2100" b="0" i="0" lang="ko-KR" altLang="en-US">
+                <a:solidFill>
+                  <a:srgbClr val="1A1A1A"/>
+                </a:solidFill>
+                <a:latin typeface="맑은 고딕"/>
+                <a:ea typeface="맑은 고딕"/>
+                <a:cs typeface="맑은 고딕"/>
+              </a:rPr>
+              <a:t>넓게 퍼질수록 온도가 높다 — 평형이면 전자도 결정도 300 K</a:t>
+            </a:r>
+          </a:p>
+        </p:txBody>
+      </p:sp>
+      <p:sp>
+        <p:nvSpPr>
+          <p:cNvPr id="13" name="Card 13"/>
+          <p:cNvSpPr/>
+          <p:nvPr/>
+        </p:nvSpPr>
+        <p:spPr>
+          <a:xfrm>
+            <a:off x="457200" y="3005328"/>
+            <a:ext cx="8229600" cy="1578864"/>
+          </a:xfrm>
+          <a:prstGeom prst="roundRect">
+            <a:avLst>
+              <a:gd name="adj" fmla="val 8000"/>
+            </a:avLst>
+          </a:prstGeom>
+          <a:solidFill>
+            <a:srgbClr val="F4F4F6"/>
+          </a:solidFill>
+          <a:ln>
+            <a:noFill/>
+          </a:ln>
+          <a:effectLst/>
+        </p:spPr>
+        <p:txBody>
+          <a:bodyPr rtlCol="0" anchor="ctr" wrap="square" lIns="54864" rIns="54864" tIns="27432" bIns="27432"/>
+          <a:lstStyle/>
+          <a:p>
+            <a:pPr algn="ctr"/>
+          </a:p>
+        </p:txBody>
+      </p:sp>
+      <p:sp>
+        <p:nvSpPr>
+          <p:cNvPr id="14" name="Oval 14"/>
+          <p:cNvSpPr/>
+          <p:nvPr/>
+        </p:nvSpPr>
+        <p:spPr>
+          <a:xfrm>
+            <a:off x="630936" y="3584448"/>
+            <a:ext cx="420624" cy="420624"/>
+          </a:xfrm>
+          <a:prstGeom prst="ellipse">
+            <a:avLst/>
+          </a:prstGeom>
+          <a:solidFill>
+            <a:srgbClr val="203864"/>
+          </a:solidFill>
+          <a:ln>
+            <a:noFill/>
+          </a:ln>
+          <a:effectLst/>
+        </p:spPr>
+        <p:txBody>
+          <a:bodyPr rtlCol="0" anchor="ctr" wrap="square" lIns="54864" rIns="54864" tIns="27432" bIns="27432"/>
+          <a:lstStyle/>
+          <a:p>
+            <a:pPr algn="ctr" eaLnBrk="0">
+              <a:lnSpc>
+                <a:spcPct val="95000"/>
+              </a:lnSpc>
+              <a:spcBef>
+                <a:spcPts val="0"/>
+              </a:spcBef>
+              <a:spcAft>
+                <a:spcPts val="0"/>
+              </a:spcAft>
+              <a:buNone/>
+            </a:pPr>
+            <a:r>
+              <a:rPr sz="2200" b="1" i="0" lang="ko-KR" altLang="en-US">
+                <a:solidFill>
+                  <a:srgbClr val="FFFFFF"/>
+                </a:solidFill>
+                <a:latin typeface="맑은 고딕"/>
+                <a:ea typeface="맑은 고딕"/>
+                <a:cs typeface="맑은 고딕"/>
+              </a:rPr>
+              <a:t>2</a:t>
+            </a:r>
+          </a:p>
+        </p:txBody>
+      </p:sp>
+      <p:sp>
+        <p:nvSpPr>
+          <p:cNvPr id="15" name="TextBox 15"/>
+          <p:cNvSpPr txBox="1"/>
+          <p:nvPr/>
+        </p:nvSpPr>
+        <p:spPr>
+          <a:xfrm>
+            <a:off x="1188720" y="3060192"/>
+            <a:ext cx="7360920" cy="1469135"/>
+          </a:xfrm>
+          <a:prstGeom prst="rect">
+            <a:avLst/>
+          </a:prstGeom>
+          <a:noFill/>
+        </p:spPr>
+        <p:txBody>
+          <a:bodyPr wrap="square" lIns="0" rIns="0" tIns="0" bIns="0" anchor="ctr">
+            <a:spAutoFit/>
+          </a:bodyPr>
+          <a:lstStyle/>
+          <a:p>
+            <a:pPr algn="l" eaLnBrk="0">
+              <a:lnSpc>
+                <a:spcPct val="95000"/>
+              </a:lnSpc>
+              <a:spcBef>
+                <a:spcPts val="0"/>
+              </a:spcBef>
+              <a:spcAft>
+                <a:spcPts val="300"/>
+              </a:spcAft>
+              <a:buNone/>
+            </a:pPr>
+            <a:r>
+              <a:rPr sz="2200" b="1" i="0" lang="ko-KR" altLang="en-US">
+                <a:solidFill>
+                  <a:srgbClr val="203864"/>
+                </a:solidFill>
+                <a:latin typeface="맑은 고딕"/>
+                <a:ea typeface="맑은 고딕"/>
+                <a:cs typeface="맑은 고딕"/>
+              </a:rPr>
+              <a:t>T</a:t>
+            </a:r>
+            <a:r>
+              <a:rPr sz="2200" b="0" i="1" baseline="-25000" lang="ko-KR" altLang="en-US">
+                <a:solidFill>
+                  <a:srgbClr val="203864"/>
+                </a:solidFill>
+                <a:latin typeface="맑은 고딕"/>
+                <a:ea typeface="맑은 고딕"/>
+                <a:cs typeface="맑은 고딕"/>
+              </a:rPr>
+              <a:t>e</a:t>
+            </a:r>
+            <a:r>
+              <a:rPr sz="2200" b="1" i="0" lang="ko-KR" altLang="en-US">
+                <a:solidFill>
+                  <a:srgbClr val="203864"/>
+                </a:solidFill>
+                <a:latin typeface="맑은 고딕"/>
+                <a:ea typeface="맑은 고딕"/>
+                <a:cs typeface="맑은 고딕"/>
+              </a:rPr>
+              <a:t> 는 전자의 온도, T</a:t>
+            </a:r>
+            <a:r>
+              <a:rPr sz="2200" b="0" i="1" baseline="-25000" lang="ko-KR" altLang="en-US">
+                <a:solidFill>
+                  <a:srgbClr val="203864"/>
+                </a:solidFill>
+                <a:latin typeface="맑은 고딕"/>
+                <a:ea typeface="맑은 고딕"/>
+                <a:cs typeface="맑은 고딕"/>
+              </a:rPr>
+              <a:t>L</a:t>
+            </a:r>
+            <a:r>
+              <a:rPr sz="2200" b="1" i="0" lang="ko-KR" altLang="en-US">
+                <a:solidFill>
+                  <a:srgbClr val="203864"/>
+                </a:solidFill>
+                <a:latin typeface="맑은 고딕"/>
+                <a:ea typeface="맑은 고딕"/>
+                <a:cs typeface="맑은 고딕"/>
+              </a:rPr>
+              <a:t> 은 결정(격자)의 온도</a:t>
+            </a:r>
+          </a:p>
+          <a:p>
+            <a:pPr algn="l" eaLnBrk="0">
+              <a:lnSpc>
+                <a:spcPct val="95000"/>
+              </a:lnSpc>
+              <a:spcBef>
+                <a:spcPts val="0"/>
+              </a:spcBef>
+              <a:spcAft>
+                <a:spcPts val="100"/>
+              </a:spcAft>
+              <a:buNone/>
+            </a:pPr>
+            <a:r>
+              <a:rPr sz="2100" b="0" i="0" lang="ko-KR" altLang="en-US">
+                <a:solidFill>
+                  <a:srgbClr val="1A1A1A"/>
+                </a:solidFill>
+                <a:latin typeface="맑은 고딕"/>
+                <a:ea typeface="맑은 고딕"/>
+                <a:cs typeface="맑은 고딕"/>
+              </a:rPr>
+              <a:t>T</a:t>
+            </a:r>
+            <a:r>
+              <a:rPr sz="2100" b="0" i="1" baseline="-25000" lang="ko-KR" altLang="en-US">
+                <a:solidFill>
+                  <a:srgbClr val="1A1A1A"/>
+                </a:solidFill>
+                <a:latin typeface="맑은 고딕"/>
+                <a:ea typeface="맑은 고딕"/>
+                <a:cs typeface="맑은 고딕"/>
+              </a:rPr>
+              <a:t>L</a:t>
+            </a:r>
+            <a:r>
+              <a:rPr sz="2100" b="0" i="0" lang="ko-KR" altLang="en-US">
+                <a:solidFill>
+                  <a:srgbClr val="1A1A1A"/>
+                </a:solidFill>
+                <a:latin typeface="맑은 고딕"/>
+                <a:ea typeface="맑은 고딕"/>
+                <a:cs typeface="맑은 고딕"/>
+              </a:rPr>
+              <a:t> — 결정이 떠는 정도. 전계를 걸어도 300 K 그대로다</a:t>
+            </a:r>
+          </a:p>
+          <a:p>
+            <a:pPr algn="l" eaLnBrk="0">
+              <a:lnSpc>
+                <a:spcPct val="95000"/>
+              </a:lnSpc>
+              <a:spcBef>
+                <a:spcPts val="0"/>
+              </a:spcBef>
+              <a:spcAft>
+                <a:spcPts val="100"/>
+              </a:spcAft>
+              <a:buNone/>
+            </a:pPr>
+            <a:r>
+              <a:rPr sz="2100" b="0" i="0" lang="ko-KR" altLang="en-US">
+                <a:solidFill>
+                  <a:srgbClr val="1A1A1A"/>
+                </a:solidFill>
+                <a:latin typeface="맑은 고딕"/>
+                <a:ea typeface="맑은 고딕"/>
+                <a:cs typeface="맑은 고딕"/>
+              </a:rPr>
+              <a:t>T</a:t>
+            </a:r>
+            <a:r>
+              <a:rPr sz="2100" b="0" i="1" baseline="-25000" lang="ko-KR" altLang="en-US">
+                <a:solidFill>
+                  <a:srgbClr val="1A1A1A"/>
+                </a:solidFill>
+                <a:latin typeface="맑은 고딕"/>
+                <a:ea typeface="맑은 고딕"/>
+                <a:cs typeface="맑은 고딕"/>
+              </a:rPr>
+              <a:t>e</a:t>
+            </a:r>
+            <a:r>
+              <a:rPr sz="2100" b="0" i="0" lang="ko-KR" altLang="en-US">
+                <a:solidFill>
+                  <a:srgbClr val="1A1A1A"/>
+                </a:solidFill>
+                <a:latin typeface="맑은 고딕"/>
+                <a:ea typeface="맑은 고딕"/>
+                <a:cs typeface="맑은 고딕"/>
+              </a:rPr>
+              <a:t> — 전자 무리가 퍼진 정도. 받은 몫을 다 못 버리면 오른다</a:t>
+            </a:r>
+          </a:p>
+        </p:txBody>
+      </p:sp>
+      <p:sp>
+        <p:nvSpPr>
+          <p:cNvPr id="16" name="Card 16"/>
+          <p:cNvSpPr/>
+          <p:nvPr/>
+        </p:nvSpPr>
+        <p:spPr>
+          <a:xfrm>
+            <a:off x="457200" y="4730496"/>
+            <a:ext cx="8229600" cy="1578864"/>
+          </a:xfrm>
+          <a:prstGeom prst="roundRect">
+            <a:avLst>
+              <a:gd name="adj" fmla="val 8000"/>
+            </a:avLst>
+          </a:prstGeom>
+          <a:solidFill>
+            <a:srgbClr val="EEF3FA"/>
+          </a:solidFill>
+          <a:ln>
+            <a:noFill/>
+          </a:ln>
+          <a:effectLst/>
+        </p:spPr>
+        <p:txBody>
+          <a:bodyPr rtlCol="0" anchor="ctr" wrap="square" lIns="54864" rIns="54864" tIns="27432" bIns="27432"/>
+          <a:lstStyle/>
+          <a:p>
+            <a:pPr algn="ctr"/>
+          </a:p>
+        </p:txBody>
+      </p:sp>
+      <p:sp>
+        <p:nvSpPr>
+          <p:cNvPr id="17" name="Oval 17"/>
+          <p:cNvSpPr/>
+          <p:nvPr/>
+        </p:nvSpPr>
+        <p:spPr>
+          <a:xfrm>
+            <a:off x="630936" y="5309616"/>
+            <a:ext cx="420624" cy="420624"/>
+          </a:xfrm>
+          <a:prstGeom prst="ellipse">
+            <a:avLst/>
+          </a:prstGeom>
+          <a:solidFill>
+            <a:srgbClr val="203864"/>
+          </a:solidFill>
+          <a:ln>
+            <a:noFill/>
+          </a:ln>
+          <a:effectLst/>
+        </p:spPr>
+        <p:txBody>
+          <a:bodyPr rtlCol="0" anchor="ctr" wrap="square" lIns="54864" rIns="54864" tIns="27432" bIns="27432"/>
+          <a:lstStyle/>
+          <a:p>
+            <a:pPr algn="ctr" eaLnBrk="0">
+              <a:lnSpc>
+                <a:spcPct val="95000"/>
+              </a:lnSpc>
+              <a:spcBef>
+                <a:spcPts val="0"/>
+              </a:spcBef>
+              <a:spcAft>
+                <a:spcPts val="0"/>
+              </a:spcAft>
+              <a:buNone/>
+            </a:pPr>
+            <a:r>
+              <a:rPr sz="2200" b="1" i="0" lang="ko-KR" altLang="en-US">
+                <a:solidFill>
+                  <a:srgbClr val="FFFFFF"/>
+                </a:solidFill>
+                <a:latin typeface="맑은 고딕"/>
+                <a:ea typeface="맑은 고딕"/>
+                <a:cs typeface="맑은 고딕"/>
+              </a:rPr>
+              <a:t>3</a:t>
+            </a:r>
+          </a:p>
+        </p:txBody>
+      </p:sp>
+      <p:sp>
+        <p:nvSpPr>
+          <p:cNvPr id="18" name="TextBox 18"/>
+          <p:cNvSpPr txBox="1"/>
+          <p:nvPr/>
+        </p:nvSpPr>
+        <p:spPr>
+          <a:xfrm>
+            <a:off x="1188720" y="4785360"/>
+            <a:ext cx="7360920" cy="1469135"/>
+          </a:xfrm>
+          <a:prstGeom prst="rect">
+            <a:avLst/>
+          </a:prstGeom>
+          <a:noFill/>
+        </p:spPr>
+        <p:txBody>
+          <a:bodyPr wrap="square" lIns="0" rIns="0" tIns="0" bIns="0" anchor="ctr">
+            <a:spAutoFit/>
+          </a:bodyPr>
+          <a:lstStyle/>
+          <a:p>
+            <a:pPr algn="l" eaLnBrk="0">
+              <a:lnSpc>
+                <a:spcPct val="95000"/>
+              </a:lnSpc>
+              <a:spcBef>
+                <a:spcPts val="0"/>
+              </a:spcBef>
+              <a:spcAft>
+                <a:spcPts val="300"/>
+              </a:spcAft>
+              <a:buNone/>
+            </a:pPr>
+            <a:r>
+              <a:rPr sz="2200" b="1" i="0" lang="ko-KR" altLang="en-US">
+                <a:solidFill>
+                  <a:srgbClr val="203864"/>
+                </a:solidFill>
+                <a:latin typeface="맑은 고딕"/>
+                <a:ea typeface="맑은 고딕"/>
+                <a:cs typeface="맑은 고딕"/>
+              </a:rPr>
+              <a:t>열전자 = T</a:t>
+            </a:r>
+            <a:r>
+              <a:rPr sz="2200" b="0" i="1" baseline="-25000" lang="ko-KR" altLang="en-US">
+                <a:solidFill>
+                  <a:srgbClr val="203864"/>
+                </a:solidFill>
+                <a:latin typeface="맑은 고딕"/>
+                <a:ea typeface="맑은 고딕"/>
+                <a:cs typeface="맑은 고딕"/>
+              </a:rPr>
+              <a:t>e</a:t>
+            </a:r>
+            <a:r>
+              <a:rPr sz="2200" b="1" i="0" lang="ko-KR" altLang="en-US">
+                <a:solidFill>
+                  <a:srgbClr val="203864"/>
+                </a:solidFill>
+                <a:latin typeface="맑은 고딕"/>
+                <a:ea typeface="맑은 고딕"/>
+                <a:cs typeface="맑은 고딕"/>
+              </a:rPr>
+              <a:t> 만 올라간 전자</a:t>
+            </a:r>
+          </a:p>
+          <a:p>
+            <a:pPr algn="l" eaLnBrk="0">
+              <a:lnSpc>
+                <a:spcPct val="95000"/>
+              </a:lnSpc>
+              <a:spcBef>
+                <a:spcPts val="0"/>
+              </a:spcBef>
+              <a:spcAft>
+                <a:spcPts val="100"/>
+              </a:spcAft>
+              <a:buNone/>
+            </a:pPr>
+            <a:r>
+              <a:rPr sz="2100" b="0" i="0" lang="ko-KR" altLang="en-US">
+                <a:solidFill>
+                  <a:srgbClr val="1A1A1A"/>
+                </a:solidFill>
+                <a:latin typeface="맑은 고딕"/>
+                <a:ea typeface="맑은 고딕"/>
+                <a:cs typeface="맑은 고딕"/>
+              </a:rPr>
+              <a:t>결정은 그대로 300 K 인데 전자만 수천 K 로 뜨거워진 상태</a:t>
+            </a:r>
+          </a:p>
+          <a:p>
+            <a:pPr algn="l" eaLnBrk="0">
+              <a:lnSpc>
+                <a:spcPct val="95000"/>
+              </a:lnSpc>
+              <a:spcBef>
+                <a:spcPts val="0"/>
+              </a:spcBef>
+              <a:spcAft>
+                <a:spcPts val="100"/>
+              </a:spcAft>
+              <a:buNone/>
+            </a:pPr>
+            <a:r>
+              <a:rPr sz="2100" b="0" i="0" lang="ko-KR" altLang="en-US">
+                <a:solidFill>
+                  <a:srgbClr val="1A1A1A"/>
+                </a:solidFill>
+                <a:latin typeface="맑은 고딕"/>
+                <a:ea typeface="맑은 고딕"/>
+                <a:cs typeface="맑은 고딕"/>
+              </a:rPr>
+              <a:t>뜨거워지면 산란이 잦아져 μ 가 작아진다 — 옴의 법칙이 깨짐</a:t>
             </a:r>
           </a:p>
         </p:txBody>

--- a/물리전자공학_3장_4강_전계에서의_표동과_이동도.pptx
+++ b/물리전자공학_3장_4강_전계에서의_표동과_이동도.pptx
@@ -54,6 +54,8 @@
     <p:sldId id="293" r:id="rId47"/>
     <p:sldId id="294" r:id="rId48"/>
     <p:sldId id="295" r:id="rId49"/>
+    <p:sldId id="321" r:id="rId75"/>
+    <p:sldId id="322" r:id="rId76"/>
     <p:sldId id="296" r:id="rId50"/>
     <p:sldId id="297" r:id="rId51"/>
     <p:sldId id="298" r:id="rId52"/>
@@ -75,6 +77,7 @@
     <p:sldId id="314" r:id="rId68"/>
     <p:sldId id="315" r:id="rId69"/>
     <p:sldId id="316" r:id="rId70"/>
+    <p:sldId id="323" r:id="rId77"/>
     <p:sldId id="317" r:id="rId71"/>
   </p:sldIdLst>
   <p:sldSz cx="9144000" cy="6858000" type="screen4x3"/>
@@ -4964,6 +4967,162 @@
 </p:notes>
 </file>
 
+<file path=ppt/notesSlides/notesSlide58.xml><?xml version="1.0" encoding="utf-8"?>
+<p:notes xmlns:a="http://schemas.openxmlformats.org/drawingml/2006/main" xmlns:p="http://schemas.openxmlformats.org/presentationml/2006/main" xmlns:r="http://schemas.openxmlformats.org/officeDocument/2006/relationships">
+  <p:cSld>
+    <p:spTree>
+      <p:nvGrpSpPr>
+        <p:cNvPr id="1" name=""/>
+        <p:cNvGrpSpPr/>
+        <p:nvPr/>
+      </p:nvGrpSpPr>
+      <p:grpSpPr>
+        <a:xfrm>
+          <a:off x="0" y="0"/>
+          <a:ext cx="0" cy="0"/>
+          <a:chOff x="0" y="0"/>
+          <a:chExt cx="0" cy="0"/>
+        </a:xfrm>
+      </p:grpSpPr>
+      <p:sp>
+        <p:nvSpPr>
+          <p:cNvPr id="2" name="Slide Image Placeholder 1"/>
+          <p:cNvSpPr>
+            <a:spLocks noGrp="1"/>
+          </p:cNvSpPr>
+          <p:nvPr>
+            <p:ph type="sldImg" idx="2"/>
+          </p:nvPr>
+        </p:nvSpPr>
+        <p:spPr/>
+      </p:sp>
+      <p:sp>
+        <p:nvSpPr>
+          <p:cNvPr id="3" name="Notes Placeholder 2"/>
+          <p:cNvSpPr>
+            <a:spLocks noGrp="1"/>
+          </p:cNvSpPr>
+          <p:nvPr>
+            <p:ph type="body" idx="3" sz="quarter"/>
+          </p:nvPr>
+        </p:nvSpPr>
+        <p:spPr/>
+        <p:txBody>
+          <a:bodyPr/>
+          <a:lstStyle/>
+          <a:p>
+            <a:r>
+              <a:rPr lang="ko-KR" altLang="en-US"/>
+              <a:t>[보충] 사용자 요청 — 「평형에서 E_F 는 꺾이지 않는다」 의 식 전개를 한 줄씩 펴 둔 장이다(교재 131~132쪽, 식 (3-53) ~ (3-58)). 부록 A5 와 같은 내용이지만 본문에서 더 자세히 따라간다. ① 전자가 물질 1 에서 2 로 건너가려면 두 가지가 동시에 있어야 한다 — 1 쪽 에너지 E 에 전자가 차 있어야 하고(그 수가 N_1(E) f_1(E)), 2 쪽의 같은 에너지 E 에 빈 자리가 있어야 한다(그 수가 N_2(E)[1-f_2(E)]). 건너가는 비율은 이 둘의 곱에 비례한다. 여기서 N(E) 는 상태밀도, f(E) 는 페르미-디랙 분포다. 왜 '같은 에너지 E 끼리' 만 세는가 — 전자가 에너지를 바꾸지 않고 자리만 옮기는 전이를 놓고 세기 때문이다(탄성 전이). ② 2 → 1 은 첨자만 맞바꾼 같은 꼴이다 — 2 쪽 찬 자리 × 1 쪽 빈 자리. ③ 평형은 '아무 일도 안 일어나는 것' 이 아니라 '오가는 수가 같아 어느 쪽도 늘지도 줄지도 않는 것' 이다. 그래서 두 비율을 같다고 놓는다. 이것을 세밀평형(detailed balance)이라 부른다. 여기까지가 식 (3-53)~(3-55) 이고, 다음 장에서 이 식을 풀어 f_1 = f_2 를 끌어낸다.</a:t>
+            </a:r>
+          </a:p>
+        </p:txBody>
+      </p:sp>
+      <p:sp>
+        <p:nvSpPr>
+          <p:cNvPr id="4" name="Slide Number Placeholder 3"/>
+          <p:cNvSpPr>
+            <a:spLocks noGrp="1"/>
+          </p:cNvSpPr>
+          <p:nvPr>
+            <p:ph type="sldNum" sz="quarter" idx="10"/>
+          </p:nvPr>
+        </p:nvSpPr>
+        <p:spPr/>
+        <p:txBody>
+          <a:bodyPr/>
+          <a:lstStyle/>
+          <a:p>
+            <a:endParaRPr lang="ko-KR" altLang="en-US"/>
+          </a:p>
+        </p:txBody>
+      </p:sp>
+    </p:spTree>
+  </p:cSld>
+  <p:clrMapOvr>
+    <a:masterClrMapping/>
+  </p:clrMapOvr>
+</p:notes>
+</file>
+
+<file path=ppt/notesSlides/notesSlide59.xml><?xml version="1.0" encoding="utf-8"?>
+<p:notes xmlns:a="http://schemas.openxmlformats.org/drawingml/2006/main" xmlns:p="http://schemas.openxmlformats.org/presentationml/2006/main" xmlns:r="http://schemas.openxmlformats.org/officeDocument/2006/relationships">
+  <p:cSld>
+    <p:spTree>
+      <p:nvGrpSpPr>
+        <p:cNvPr id="1" name=""/>
+        <p:cNvGrpSpPr/>
+        <p:nvPr/>
+      </p:nvGrpSpPr>
+      <p:grpSpPr>
+        <a:xfrm>
+          <a:off x="0" y="0"/>
+          <a:ext cx="0" cy="0"/>
+          <a:chOff x="0" y="0"/>
+          <a:chExt cx="0" cy="0"/>
+        </a:xfrm>
+      </p:grpSpPr>
+      <p:sp>
+        <p:nvSpPr>
+          <p:cNvPr id="2" name="Slide Image Placeholder 1"/>
+          <p:cNvSpPr>
+            <a:spLocks noGrp="1"/>
+          </p:cNvSpPr>
+          <p:nvPr>
+            <p:ph type="sldImg" idx="2"/>
+          </p:nvPr>
+        </p:nvSpPr>
+        <p:spPr/>
+      </p:sp>
+      <p:sp>
+        <p:nvSpPr>
+          <p:cNvPr id="3" name="Notes Placeholder 2"/>
+          <p:cNvSpPr>
+            <a:spLocks noGrp="1"/>
+          </p:cNvSpPr>
+          <p:nvPr>
+            <p:ph type="body" idx="3" sz="quarter"/>
+          </p:nvPr>
+        </p:nvSpPr>
+        <p:spPr/>
+        <p:txBody>
+          <a:bodyPr/>
+          <a:lstStyle/>
+          <a:p>
+            <a:r>
+              <a:rPr lang="ko-KR" altLang="en-US"/>
+              <a:t>[보충] 앞 장에서 세운 식 (3-55) 를 푸는 장이다. ④ 좌변을 펴면 N_1f_1N_2(1-f_2) = N_1N_2 f_1 - N_1N_2 f_1f_2 이고, 우변을 펴면 N_2f_2N_1(1-f_1) = N_1N_2 f_2 - N_1N_2 f_1f_2 다. 양변에 똑같이 들어 있는 N_1N_2 f_1f_2 항이 서로 지워진다 — 이 상쇄가 이 유도의 첫 고비다. ⑤ 남는 것은 N_1N_2 f_1 = N_1N_2 f_2, 곧 N_1N_2(f_1 - f_2) = 0 이다. 상태밀도는 0 이 아니므로 f_1(E) = f_2(E) 가 된다(식 3-57). 여기서 중요한 것은 N_1 · N_2 가 통째로 빠졌다는 점이다 — 두 물질의 상태밀도가 서로 아무리 달라도 결론이 바뀌지 않는다. 그래서 이 결과는 '어떤 두 물질을 붙이든' 성립한다. ⑥ f 의 꼴은 f(E) = 1/[1 + e^{(E-E_F)/kT}] 이고, 이 곡선의 모양을 정하는 것은 E_F 하나뿐이다(온도가 같다면). 따라서 모든 에너지 E 에서 f_1 = f_2 이려면 E_F1 = E_F2 여야 한다. 두 물질이 아니라 시료 안의 두 지점으로 보면 같은 논리가 어디서나 성립하므로 dE_F/dx = 0 (식 3-58)이 된다. 휘는 것은 E_c · E_v 이고 평평한 것은 E_F 라는 점을 다시 확인하고 다음 장으로 넘어간다. 이 한 줄이 5 장 pn 접합 대역도의 출발점이다.</a:t>
+            </a:r>
+          </a:p>
+        </p:txBody>
+      </p:sp>
+      <p:sp>
+        <p:nvSpPr>
+          <p:cNvPr id="4" name="Slide Number Placeholder 3"/>
+          <p:cNvSpPr>
+            <a:spLocks noGrp="1"/>
+          </p:cNvSpPr>
+          <p:nvPr>
+            <p:ph type="sldNum" sz="quarter" idx="10"/>
+          </p:nvPr>
+        </p:nvSpPr>
+        <p:spPr/>
+        <p:txBody>
+          <a:bodyPr/>
+          <a:lstStyle/>
+          <a:p>
+            <a:endParaRPr lang="ko-KR" altLang="en-US"/>
+          </a:p>
+        </p:txBody>
+      </p:sp>
+    </p:spTree>
+  </p:cSld>
+  <p:clrMapOvr>
+    <a:masterClrMapping/>
+  </p:clrMapOvr>
+</p:notes>
+</file>
+
 <file path=ppt/notesSlides/notesSlide6.xml><?xml version="1.0" encoding="utf-8"?>
 <p:notes xmlns:a="http://schemas.openxmlformats.org/drawingml/2006/main" xmlns:p="http://schemas.openxmlformats.org/presentationml/2006/main" xmlns:r="http://schemas.openxmlformats.org/officeDocument/2006/relationships">
   <p:cSld>
@@ -5026,6 +5185,84 @@
           </p:nvPr>
         </p:nvSpPr>
         <p:spPr/>
+      </p:sp>
+    </p:spTree>
+  </p:cSld>
+  <p:clrMapOvr>
+    <a:masterClrMapping/>
+  </p:clrMapOvr>
+</p:notes>
+</file>
+
+<file path=ppt/notesSlides/notesSlide60.xml><?xml version="1.0" encoding="utf-8"?>
+<p:notes xmlns:a="http://schemas.openxmlformats.org/drawingml/2006/main" xmlns:p="http://schemas.openxmlformats.org/presentationml/2006/main" xmlns:r="http://schemas.openxmlformats.org/officeDocument/2006/relationships">
+  <p:cSld>
+    <p:spTree>
+      <p:nvGrpSpPr>
+        <p:cNvPr id="1" name=""/>
+        <p:cNvGrpSpPr/>
+        <p:nvPr/>
+      </p:nvGrpSpPr>
+      <p:grpSpPr>
+        <a:xfrm>
+          <a:off x="0" y="0"/>
+          <a:ext cx="0" cy="0"/>
+          <a:chOff x="0" y="0"/>
+          <a:chExt cx="0" cy="0"/>
+        </a:xfrm>
+      </p:grpSpPr>
+      <p:sp>
+        <p:nvSpPr>
+          <p:cNvPr id="2" name="Slide Image Placeholder 1"/>
+          <p:cNvSpPr>
+            <a:spLocks noGrp="1"/>
+          </p:cNvSpPr>
+          <p:nvPr>
+            <p:ph type="sldImg" idx="2"/>
+          </p:nvPr>
+        </p:nvSpPr>
+        <p:spPr/>
+      </p:sp>
+      <p:sp>
+        <p:nvSpPr>
+          <p:cNvPr id="3" name="Notes Placeholder 2"/>
+          <p:cNvSpPr>
+            <a:spLocks noGrp="1"/>
+          </p:cNvSpPr>
+          <p:nvPr>
+            <p:ph type="body" idx="3" sz="quarter"/>
+          </p:nvPr>
+        </p:nvSpPr>
+        <p:spPr/>
+        <p:txBody>
+          <a:bodyPr/>
+          <a:lstStyle/>
+          <a:p>
+            <a:r>
+              <a:rPr lang="ko-KR" altLang="en-US"/>
+              <a:t>[보충] 사용자 요청 — 예제 3-8 의 '1 kG = 10^-5 Wb/cm²' 가 어디서 왔는지 단위부터 정리한 장이다. ① 자속 Φ(magnetic flux)는 자기력선이 어떤 넓이를 꿰뚫는 총량이고 단위는 Wb(웨버)다. 1 Wb = 1 V·s 인 까닭은 패러데이 법칙 V = -dΦ/dt 때문이다 — 1 Wb 의 자속이 1 초 만에 사라지면 1 V 가 유도된다. ② 자속밀도 𝓑(magnetic flux density)는 그 자속을 넓이로 나눈 값으로 SI 단위가 Wb/m², 이것을 T(테슬라)라 부른다. 홀 효과의 로렌츠 힘 F = qv × 𝓑 에 들어가는 것은 Φ 가 아니라 𝓑 다. 교재와 자석 업계에서 흔히 쓰는 CGS 단위가 G(가우스)이고 1 T = 10^4 G 다. ③ 교재가 Wb/cm² 를 쓰는 까닭 — 반도체에서는 농도(cm^-3), 이동도(cm²/V·s), 길이(cm)를 모두 cm 계로 적으므로 자속밀도도 cm 계로 맞춰야 식 (3-50) 에 그대로 넣을 수 있다. 넓이가 m² → cm² 로 10^4 배 작아지므로 1 Wb/cm² = 10^4 Wb/m² = 10^4 T 이고, 거꾸로 1 kG = 0.1 T = 10^-5 Wb/cm² 가 된다. ④ 그래서 예제 3-8 의 𝓑 = 10 kG 는 1 T, 곧 10^-4 Wb/cm² 다. 단위 검산도 해 둘 것 — p_0 = I_x𝓑_z/(q t V_AB) 에서 [A][Wb/cm²] / ([C][cm][V]) 이고, A = C/s, Wb = V·s 이므로 분자가 (C/s)(V·s)/cm² = C·V/cm², 분모가 C·cm·V 라 결과가 cm^-3 으로 딱 떨어진다. 크기 감각 — 지구 자기장이 약 0.5 G(5×10^-5 T), 냉장고 자석이 약 50 mT(500 G), 병원 MRI 가 1.5~3 T 다. 예제의 10 kG = 1 T 는 실험실 전자석으로 낼 수 있는 꽤 센 자계다.</a:t>
+            </a:r>
+          </a:p>
+        </p:txBody>
+      </p:sp>
+      <p:sp>
+        <p:nvSpPr>
+          <p:cNvPr id="4" name="Slide Number Placeholder 3"/>
+          <p:cNvSpPr>
+            <a:spLocks noGrp="1"/>
+          </p:cNvSpPr>
+          <p:nvPr>
+            <p:ph type="sldNum" sz="quarter" idx="10"/>
+          </p:nvPr>
+        </p:nvSpPr>
+        <p:spPr/>
+        <p:txBody>
+          <a:bodyPr/>
+          <a:lstStyle/>
+          <a:p>
+            <a:endParaRPr lang="ko-KR" altLang="en-US"/>
+          </a:p>
+        </p:txBody>
       </p:sp>
     </p:spTree>
   </p:cSld>
@@ -29241,7 +29478,7 @@
                 <a:ea typeface="맑은 고딕"/>
                 <a:cs typeface="맑은 고딕"/>
               </a:rPr>
-              <a:t>[보충] 앞 장을 물 비유와 오가는 전자로 · 식은 부록 A5</a:t>
+              <a:t>[보충] 앞 장을 물 비유와 오가는 전자로 · 식 전개는 다음 두 장</a:t>
             </a:r>
           </a:p>
         </p:txBody>
@@ -57622,6 +57859,3058 @@
                 <a:cs typeface="맑은 고딕"/>
               </a:rPr>
               <a:t>뜨거워지면 산란이 잦아져 μ 가 작아진다 — 옴의 법칙이 깨짐</a:t>
+            </a:r>
+          </a:p>
+        </p:txBody>
+      </p:sp>
+    </p:spTree>
+  </p:cSld>
+  <p:clrMapOvr>
+    <a:masterClrMapping/>
+  </p:clrMapOvr>
+</p:sld>
+</file>
+
+<file path=ppt/slides/slide66.xml><?xml version="1.0" encoding="utf-8"?>
+<p:sld xmlns:a="http://schemas.openxmlformats.org/drawingml/2006/main" xmlns:p="http://schemas.openxmlformats.org/presentationml/2006/main" xmlns:r="http://schemas.openxmlformats.org/officeDocument/2006/relationships">
+  <p:cSld>
+    <p:spTree>
+      <p:nvGrpSpPr>
+        <p:cNvPr id="1" name=""/>
+        <p:cNvGrpSpPr/>
+        <p:nvPr/>
+      </p:nvGrpSpPr>
+      <p:grpSpPr/>
+      <p:sp>
+        <p:nvSpPr>
+          <p:cNvPr id="2" name="Title 1"/>
+          <p:cNvSpPr>
+            <a:spLocks noGrp="1"/>
+          </p:cNvSpPr>
+          <p:nvPr>
+            <p:ph type="title"/>
+          </p:nvPr>
+        </p:nvSpPr>
+        <p:spPr>
+          <a:xfrm>
+            <a:off x="274320" y="118872"/>
+            <a:ext cx="8595360" cy="749808"/>
+          </a:xfrm>
+        </p:spPr>
+        <p:txBody>
+          <a:bodyPr wrap="square"/>
+          <a:lstStyle/>
+          <a:p>
+            <a:r>
+              <a:rPr sz="3000" b="1" i="0" lang="ko-KR" altLang="en-US">
+                <a:solidFill>
+                  <a:srgbClr val="203864"/>
+                </a:solidFill>
+                <a:latin typeface="돋움"/>
+                <a:ea typeface="돋움"/>
+                <a:cs typeface="돋움"/>
+              </a:rPr>
+              <a:t>[보충] E</a:t>
+            </a:r>
+            <a:r>
+              <a:rPr sz="3000" b="1" i="1" baseline="-25000" lang="ko-KR" altLang="en-US">
+                <a:solidFill>
+                  <a:srgbClr val="203864"/>
+                </a:solidFill>
+                <a:latin typeface="돋움"/>
+                <a:ea typeface="돋움"/>
+                <a:cs typeface="돋움"/>
+              </a:rPr>
+              <a:t>F</a:t>
+            </a:r>
+            <a:r>
+              <a:rPr sz="3000" b="1" i="0" lang="ko-KR" altLang="en-US">
+                <a:solidFill>
+                  <a:srgbClr val="203864"/>
+                </a:solidFill>
+                <a:latin typeface="돋움"/>
+                <a:ea typeface="돋움"/>
+                <a:cs typeface="돋움"/>
+              </a:rPr>
+              <a:t> 가 하나가 되는 식 (1/2)</a:t>
+            </a:r>
+          </a:p>
+        </p:txBody>
+      </p:sp>
+      <p:sp>
+        <p:nvSpPr>
+          <p:cNvPr id="3" name="TextBox 2"/>
+          <p:cNvSpPr txBox="1"/>
+          <p:nvPr/>
+        </p:nvSpPr>
+        <p:spPr>
+          <a:xfrm>
+            <a:off x="457200" y="6382512"/>
+            <a:ext cx="4206240" cy="329184"/>
+          </a:xfrm>
+          <a:prstGeom prst="rect">
+            <a:avLst/>
+          </a:prstGeom>
+          <a:noFill/>
+        </p:spPr>
+        <p:txBody>
+          <a:bodyPr wrap="none" lIns="0" rIns="0" tIns="0" bIns="0">
+            <a:spAutoFit/>
+          </a:bodyPr>
+          <a:lstStyle/>
+          <a:p>
+            <a:pPr algn="l"/>
+            <a:r>
+              <a:rPr sz="1600" lang="ko-KR" altLang="en-US">
+                <a:solidFill>
+                  <a:srgbClr val="6E6E6E"/>
+                </a:solidFill>
+                <a:latin typeface="Arial"/>
+                <a:ea typeface="맑은 고딕"/>
+                <a:cs typeface="맑은 고딕"/>
+              </a:rPr>
+              <a:t>Generated by Claude</a:t>
+            </a:r>
+          </a:p>
+        </p:txBody>
+      </p:sp>
+      <p:sp>
+        <p:nvSpPr>
+          <p:cNvPr id="4" name="TextBox 3"/>
+          <p:cNvSpPr txBox="1"/>
+          <p:nvPr/>
+        </p:nvSpPr>
+        <p:spPr>
+          <a:xfrm>
+            <a:off x="475488" y="877824"/>
+            <a:ext cx="8229600" cy="310896"/>
+          </a:xfrm>
+          <a:prstGeom prst="rect">
+            <a:avLst/>
+          </a:prstGeom>
+          <a:noFill/>
+        </p:spPr>
+        <p:txBody>
+          <a:bodyPr wrap="square" lIns="0" rIns="0" tIns="0" bIns="0" anchor="t">
+            <a:spAutoFit/>
+          </a:bodyPr>
+          <a:lstStyle/>
+          <a:p>
+            <a:pPr algn="l" eaLnBrk="0">
+              <a:lnSpc>
+                <a:spcPct val="95000"/>
+              </a:lnSpc>
+              <a:spcBef>
+                <a:spcPts val="0"/>
+              </a:spcBef>
+              <a:spcAft>
+                <a:spcPts val="0"/>
+              </a:spcAft>
+              <a:buNone/>
+            </a:pPr>
+            <a:r>
+              <a:rPr sz="2100" b="0" i="0" lang="ko-KR" altLang="en-US">
+                <a:solidFill>
+                  <a:srgbClr val="595959"/>
+                </a:solidFill>
+                <a:latin typeface="맑은 고딕"/>
+                <a:ea typeface="맑은 고딕"/>
+                <a:cs typeface="맑은 고딕"/>
+              </a:rPr>
+              <a:t>[보충] 교재 131~132쪽 · 식 (3-53) ~ (3-55) · 흐름을 세운다</a:t>
+            </a:r>
+          </a:p>
+        </p:txBody>
+      </p:sp>
+      <p:sp>
+        <p:nvSpPr>
+          <p:cNvPr id="10" name="Card 10"/>
+          <p:cNvSpPr/>
+          <p:nvPr/>
+        </p:nvSpPr>
+        <p:spPr>
+          <a:xfrm>
+            <a:off x="457200" y="1188720"/>
+            <a:ext cx="8229600" cy="1691639"/>
+          </a:xfrm>
+          <a:prstGeom prst="roundRect">
+            <a:avLst>
+              <a:gd name="adj" fmla="val 8000"/>
+            </a:avLst>
+          </a:prstGeom>
+          <a:solidFill>
+            <a:srgbClr val="F4F4F6"/>
+          </a:solidFill>
+          <a:ln>
+            <a:noFill/>
+          </a:ln>
+          <a:effectLst/>
+        </p:spPr>
+        <p:txBody>
+          <a:bodyPr rtlCol="0" anchor="ctr" wrap="square" lIns="54864" rIns="54864" tIns="27432" bIns="27432"/>
+          <a:lstStyle/>
+          <a:p>
+            <a:pPr algn="ctr"/>
+          </a:p>
+        </p:txBody>
+      </p:sp>
+      <p:sp>
+        <p:nvSpPr>
+          <p:cNvPr id="11" name="Oval 11"/>
+          <p:cNvSpPr/>
+          <p:nvPr/>
+        </p:nvSpPr>
+        <p:spPr>
+          <a:xfrm>
+            <a:off x="594360" y="1291849"/>
+            <a:ext cx="384048" cy="360950"/>
+          </a:xfrm>
+          <a:prstGeom prst="ellipse">
+            <a:avLst/>
+          </a:prstGeom>
+          <a:solidFill>
+            <a:srgbClr val="203864"/>
+          </a:solidFill>
+          <a:ln>
+            <a:noFill/>
+          </a:ln>
+          <a:effectLst/>
+        </p:spPr>
+        <p:txBody>
+          <a:bodyPr rtlCol="0" anchor="ctr" wrap="square" lIns="54864" rIns="54864" tIns="27432" bIns="27432"/>
+          <a:lstStyle/>
+          <a:p>
+            <a:pPr algn="ctr" eaLnBrk="0">
+              <a:lnSpc>
+                <a:spcPct val="95000"/>
+              </a:lnSpc>
+              <a:spcBef>
+                <a:spcPts val="0"/>
+              </a:spcBef>
+              <a:spcAft>
+                <a:spcPts val="0"/>
+              </a:spcAft>
+              <a:buNone/>
+            </a:pPr>
+            <a:r>
+              <a:rPr sz="2100" b="1" i="0" lang="ko-KR" altLang="en-US">
+                <a:solidFill>
+                  <a:srgbClr val="FFFFFF"/>
+                </a:solidFill>
+                <a:latin typeface="맑은 고딕"/>
+                <a:ea typeface="맑은 고딕"/>
+                <a:cs typeface="맑은 고딕"/>
+              </a:rPr>
+              <a:t>1</a:t>
+            </a:r>
+          </a:p>
+        </p:txBody>
+      </p:sp>
+      <p:sp>
+        <p:nvSpPr>
+          <p:cNvPr id="12" name="TextBox 12"/>
+          <p:cNvSpPr txBox="1"/>
+          <p:nvPr/>
+        </p:nvSpPr>
+        <p:spPr>
+          <a:xfrm>
+            <a:off x="1170432" y="1283255"/>
+            <a:ext cx="7296912" cy="800000"/>
+          </a:xfrm>
+          <a:prstGeom prst="rect">
+            <a:avLst/>
+          </a:prstGeom>
+          <a:noFill/>
+        </p:spPr>
+        <p:txBody>
+          <a:bodyPr wrap="square" lIns="0" rIns="0" tIns="0" bIns="0" anchor="t">
+            <a:spAutoFit/>
+          </a:bodyPr>
+          <a:lstStyle/>
+          <a:p>
+            <a:pPr algn="l" eaLnBrk="0">
+              <a:lnSpc>
+                <a:spcPct val="95000"/>
+              </a:lnSpc>
+              <a:spcBef>
+                <a:spcPts val="0"/>
+              </a:spcBef>
+              <a:spcAft>
+                <a:spcPts val="200"/>
+              </a:spcAft>
+              <a:buNone/>
+            </a:pPr>
+            <a:r>
+              <a:rPr sz="2200" b="1" i="0" lang="ko-KR" altLang="en-US">
+                <a:solidFill>
+                  <a:srgbClr val="203864"/>
+                </a:solidFill>
+                <a:latin typeface="맑은 고딕"/>
+                <a:ea typeface="맑은 고딕"/>
+                <a:cs typeface="맑은 고딕"/>
+              </a:rPr>
+              <a:t>1 → 2 로 건너가는 비율</a:t>
+            </a:r>
+          </a:p>
+          <a:p>
+            <a:pPr algn="l" eaLnBrk="0">
+              <a:lnSpc>
+                <a:spcPct val="95000"/>
+              </a:lnSpc>
+              <a:spcBef>
+                <a:spcPts val="0"/>
+              </a:spcBef>
+              <a:spcAft>
+                <a:spcPts val="0"/>
+              </a:spcAft>
+              <a:buNone/>
+            </a:pPr>
+            <a:r>
+              <a:rPr sz="2100" b="0" i="0" lang="ko-KR" altLang="en-US">
+                <a:solidFill>
+                  <a:srgbClr val="1A1A1A"/>
+                </a:solidFill>
+                <a:latin typeface="맑은 고딕"/>
+                <a:ea typeface="맑은 고딕"/>
+                <a:cs typeface="맑은 고딕"/>
+              </a:rPr>
+              <a:t>1 쪽의 </a:t>
+            </a:r>
+            <a:r>
+              <a:rPr sz="2100" b="1" i="0" lang="ko-KR" altLang="en-US">
+                <a:solidFill>
+                  <a:srgbClr val="1A1A1A"/>
+                </a:solidFill>
+                <a:latin typeface="맑은 고딕"/>
+                <a:ea typeface="맑은 고딕"/>
+                <a:cs typeface="맑은 고딕"/>
+              </a:rPr>
+              <a:t>찬 자리</a:t>
+            </a:r>
+            <a:r>
+              <a:rPr sz="2100" b="0" i="0" lang="ko-KR" altLang="en-US">
+                <a:solidFill>
+                  <a:srgbClr val="1A1A1A"/>
+                </a:solidFill>
+                <a:latin typeface="맑은 고딕"/>
+                <a:ea typeface="맑은 고딕"/>
+                <a:cs typeface="맑은 고딕"/>
+              </a:rPr>
+              <a:t> × 2 쪽의 </a:t>
+            </a:r>
+            <a:r>
+              <a:rPr sz="2100" b="1" i="0" lang="ko-KR" altLang="en-US">
+                <a:solidFill>
+                  <a:srgbClr val="1A1A1A"/>
+                </a:solidFill>
+                <a:latin typeface="맑은 고딕"/>
+                <a:ea typeface="맑은 고딕"/>
+                <a:cs typeface="맑은 고딕"/>
+              </a:rPr>
+              <a:t>빈 자리</a:t>
+            </a:r>
+            <a:r>
+              <a:rPr sz="2100" b="0" i="0" lang="ko-KR" altLang="en-US">
+                <a:solidFill>
+                  <a:srgbClr val="1A1A1A"/>
+                </a:solidFill>
+                <a:latin typeface="맑은 고딕"/>
+                <a:ea typeface="맑은 고딕"/>
+                <a:cs typeface="맑은 고딕"/>
+              </a:rPr>
+              <a:t> — 둘 다 있어야 건너간다</a:t>
+            </a:r>
+          </a:p>
+        </p:txBody>
+      </p:sp>
+      <p:pic>
+        <p:nvPicPr>
+          <p:cNvPr id="13" name="EQS001"/>
+          <p:cNvPicPr>
+            <a:picLocks noChangeAspect="1"/>
+          </p:cNvPicPr>
+          <p:nvPr/>
+        </p:nvPicPr>
+        <p:blipFill>
+          <a:blip r:embed="rId10"/>
+          <a:stretch>
+            <a:fillRect/>
+          </a:stretch>
+        </p:blipFill>
+        <p:spPr>
+          <a:xfrm>
+            <a:off x="1225387" y="2342859"/>
+            <a:ext cx="4970400" cy="427500"/>
+          </a:xfrm>
+          <a:prstGeom prst="rect">
+            <a:avLst/>
+          </a:prstGeom>
+        </p:spPr>
+      </p:pic>
+      <p:sp>
+        <p:nvSpPr>
+          <p:cNvPr id="14" name="TextBox 14"/>
+          <p:cNvSpPr txBox="1"/>
+          <p:nvPr/>
+        </p:nvSpPr>
+        <p:spPr>
+          <a:xfrm>
+            <a:off x="6375787" y="2391609"/>
+            <a:ext cx="1700000" cy="330000"/>
+          </a:xfrm>
+          <a:prstGeom prst="rect">
+            <a:avLst/>
+          </a:prstGeom>
+          <a:noFill/>
+        </p:spPr>
+        <p:txBody>
+          <a:bodyPr wrap="square" lIns="0" rIns="0" tIns="0" bIns="0" anchor="t">
+            <a:spAutoFit/>
+          </a:bodyPr>
+          <a:lstStyle/>
+          <a:p>
+            <a:pPr algn="l" eaLnBrk="0">
+              <a:lnSpc>
+                <a:spcPct val="95000"/>
+              </a:lnSpc>
+              <a:spcBef>
+                <a:spcPts val="0"/>
+              </a:spcBef>
+              <a:spcAft>
+                <a:spcPts val="0"/>
+              </a:spcAft>
+              <a:buNone/>
+            </a:pPr>
+            <a:r>
+              <a:rPr sz="2100" b="0" i="0" lang="ko-KR" altLang="en-US">
+                <a:solidFill>
+                  <a:srgbClr val="C00000"/>
+                </a:solidFill>
+                <a:latin typeface="맑은 고딕"/>
+                <a:ea typeface="맑은 고딕"/>
+                <a:cs typeface="맑은 고딕"/>
+              </a:rPr>
+              <a:t>식 (3-53)</a:t>
+            </a:r>
+          </a:p>
+        </p:txBody>
+      </p:sp>
+      <p:sp>
+        <p:nvSpPr>
+          <p:cNvPr id="15" name="Card 15"/>
+          <p:cNvSpPr/>
+          <p:nvPr/>
+        </p:nvSpPr>
+        <p:spPr>
+          <a:xfrm>
+            <a:off x="457200" y="2903220"/>
+            <a:ext cx="8229600" cy="1691639"/>
+          </a:xfrm>
+          <a:prstGeom prst="roundRect">
+            <a:avLst>
+              <a:gd name="adj" fmla="val 8000"/>
+            </a:avLst>
+          </a:prstGeom>
+          <a:solidFill>
+            <a:srgbClr val="F4F4F6"/>
+          </a:solidFill>
+          <a:ln>
+            <a:noFill/>
+          </a:ln>
+          <a:effectLst/>
+        </p:spPr>
+        <p:txBody>
+          <a:bodyPr rtlCol="0" anchor="ctr" wrap="square" lIns="54864" rIns="54864" tIns="27432" bIns="27432"/>
+          <a:lstStyle/>
+          <a:p>
+            <a:pPr algn="ctr"/>
+          </a:p>
+        </p:txBody>
+      </p:sp>
+      <p:sp>
+        <p:nvSpPr>
+          <p:cNvPr id="16" name="Oval 16"/>
+          <p:cNvSpPr/>
+          <p:nvPr/>
+        </p:nvSpPr>
+        <p:spPr>
+          <a:xfrm>
+            <a:off x="594360" y="3006349"/>
+            <a:ext cx="384048" cy="360950"/>
+          </a:xfrm>
+          <a:prstGeom prst="ellipse">
+            <a:avLst/>
+          </a:prstGeom>
+          <a:solidFill>
+            <a:srgbClr val="203864"/>
+          </a:solidFill>
+          <a:ln>
+            <a:noFill/>
+          </a:ln>
+          <a:effectLst/>
+        </p:spPr>
+        <p:txBody>
+          <a:bodyPr rtlCol="0" anchor="ctr" wrap="square" lIns="54864" rIns="54864" tIns="27432" bIns="27432"/>
+          <a:lstStyle/>
+          <a:p>
+            <a:pPr algn="ctr" eaLnBrk="0">
+              <a:lnSpc>
+                <a:spcPct val="95000"/>
+              </a:lnSpc>
+              <a:spcBef>
+                <a:spcPts val="0"/>
+              </a:spcBef>
+              <a:spcAft>
+                <a:spcPts val="0"/>
+              </a:spcAft>
+              <a:buNone/>
+            </a:pPr>
+            <a:r>
+              <a:rPr sz="2100" b="1" i="0" lang="ko-KR" altLang="en-US">
+                <a:solidFill>
+                  <a:srgbClr val="FFFFFF"/>
+                </a:solidFill>
+                <a:latin typeface="맑은 고딕"/>
+                <a:ea typeface="맑은 고딕"/>
+                <a:cs typeface="맑은 고딕"/>
+              </a:rPr>
+              <a:t>2</a:t>
+            </a:r>
+          </a:p>
+        </p:txBody>
+      </p:sp>
+      <p:sp>
+        <p:nvSpPr>
+          <p:cNvPr id="17" name="TextBox 17"/>
+          <p:cNvSpPr txBox="1"/>
+          <p:nvPr/>
+        </p:nvSpPr>
+        <p:spPr>
+          <a:xfrm>
+            <a:off x="1170432" y="2997755"/>
+            <a:ext cx="7296912" cy="800000"/>
+          </a:xfrm>
+          <a:prstGeom prst="rect">
+            <a:avLst/>
+          </a:prstGeom>
+          <a:noFill/>
+        </p:spPr>
+        <p:txBody>
+          <a:bodyPr wrap="square" lIns="0" rIns="0" tIns="0" bIns="0" anchor="t">
+            <a:spAutoFit/>
+          </a:bodyPr>
+          <a:lstStyle/>
+          <a:p>
+            <a:pPr algn="l" eaLnBrk="0">
+              <a:lnSpc>
+                <a:spcPct val="95000"/>
+              </a:lnSpc>
+              <a:spcBef>
+                <a:spcPts val="0"/>
+              </a:spcBef>
+              <a:spcAft>
+                <a:spcPts val="200"/>
+              </a:spcAft>
+              <a:buNone/>
+            </a:pPr>
+            <a:r>
+              <a:rPr sz="2200" b="1" i="0" lang="ko-KR" altLang="en-US">
+                <a:solidFill>
+                  <a:srgbClr val="203864"/>
+                </a:solidFill>
+                <a:latin typeface="맑은 고딕"/>
+                <a:ea typeface="맑은 고딕"/>
+                <a:cs typeface="맑은 고딕"/>
+              </a:rPr>
+              <a:t>2 → 1 로 건너가는 비율</a:t>
+            </a:r>
+          </a:p>
+          <a:p>
+            <a:pPr algn="l" eaLnBrk="0">
+              <a:lnSpc>
+                <a:spcPct val="95000"/>
+              </a:lnSpc>
+              <a:spcBef>
+                <a:spcPts val="0"/>
+              </a:spcBef>
+              <a:spcAft>
+                <a:spcPts val="0"/>
+              </a:spcAft>
+              <a:buNone/>
+            </a:pPr>
+            <a:r>
+              <a:rPr sz="2100" b="0" i="0" lang="ko-KR" altLang="en-US">
+                <a:solidFill>
+                  <a:srgbClr val="1A1A1A"/>
+                </a:solidFill>
+                <a:latin typeface="맑은 고딕"/>
+                <a:ea typeface="맑은 고딕"/>
+                <a:cs typeface="맑은 고딕"/>
+              </a:rPr>
+              <a:t>첨자만 맞바꾼 같은 꼴 — 같은 에너지 E 끼리만 센다</a:t>
+            </a:r>
+          </a:p>
+        </p:txBody>
+      </p:sp>
+      <p:pic>
+        <p:nvPicPr>
+          <p:cNvPr id="18" name="EQS002"/>
+          <p:cNvPicPr>
+            <a:picLocks noChangeAspect="1"/>
+          </p:cNvPicPr>
+          <p:nvPr/>
+        </p:nvPicPr>
+        <p:blipFill>
+          <a:blip r:embed="rId11"/>
+          <a:stretch>
+            <a:fillRect/>
+          </a:stretch>
+        </p:blipFill>
+        <p:spPr>
+          <a:xfrm>
+            <a:off x="1225387" y="4057359"/>
+            <a:ext cx="4970400" cy="427500"/>
+          </a:xfrm>
+          <a:prstGeom prst="rect">
+            <a:avLst/>
+          </a:prstGeom>
+        </p:spPr>
+      </p:pic>
+      <p:sp>
+        <p:nvSpPr>
+          <p:cNvPr id="19" name="TextBox 19"/>
+          <p:cNvSpPr txBox="1"/>
+          <p:nvPr/>
+        </p:nvSpPr>
+        <p:spPr>
+          <a:xfrm>
+            <a:off x="6375787" y="4106109"/>
+            <a:ext cx="1700000" cy="330000"/>
+          </a:xfrm>
+          <a:prstGeom prst="rect">
+            <a:avLst/>
+          </a:prstGeom>
+          <a:noFill/>
+        </p:spPr>
+        <p:txBody>
+          <a:bodyPr wrap="square" lIns="0" rIns="0" tIns="0" bIns="0" anchor="t">
+            <a:spAutoFit/>
+          </a:bodyPr>
+          <a:lstStyle/>
+          <a:p>
+            <a:pPr algn="l" eaLnBrk="0">
+              <a:lnSpc>
+                <a:spcPct val="95000"/>
+              </a:lnSpc>
+              <a:spcBef>
+                <a:spcPts val="0"/>
+              </a:spcBef>
+              <a:spcAft>
+                <a:spcPts val="0"/>
+              </a:spcAft>
+              <a:buNone/>
+            </a:pPr>
+            <a:r>
+              <a:rPr sz="2100" b="0" i="0" lang="ko-KR" altLang="en-US">
+                <a:solidFill>
+                  <a:srgbClr val="C00000"/>
+                </a:solidFill>
+                <a:latin typeface="맑은 고딕"/>
+                <a:ea typeface="맑은 고딕"/>
+                <a:cs typeface="맑은 고딕"/>
+              </a:rPr>
+              <a:t>식 (3-54)</a:t>
+            </a:r>
+          </a:p>
+        </p:txBody>
+      </p:sp>
+      <p:sp>
+        <p:nvSpPr>
+          <p:cNvPr id="20" name="Card 20"/>
+          <p:cNvSpPr/>
+          <p:nvPr/>
+        </p:nvSpPr>
+        <p:spPr>
+          <a:xfrm>
+            <a:off x="457200" y="4617720"/>
+            <a:ext cx="8229600" cy="1691639"/>
+          </a:xfrm>
+          <a:prstGeom prst="roundRect">
+            <a:avLst>
+              <a:gd name="adj" fmla="val 8000"/>
+            </a:avLst>
+          </a:prstGeom>
+          <a:solidFill>
+            <a:srgbClr val="F4F4F6"/>
+          </a:solidFill>
+          <a:ln>
+            <a:noFill/>
+          </a:ln>
+          <a:effectLst/>
+        </p:spPr>
+        <p:txBody>
+          <a:bodyPr rtlCol="0" anchor="ctr" wrap="square" lIns="54864" rIns="54864" tIns="27432" bIns="27432"/>
+          <a:lstStyle/>
+          <a:p>
+            <a:pPr algn="ctr"/>
+          </a:p>
+        </p:txBody>
+      </p:sp>
+      <p:sp>
+        <p:nvSpPr>
+          <p:cNvPr id="21" name="Oval 21"/>
+          <p:cNvSpPr/>
+          <p:nvPr/>
+        </p:nvSpPr>
+        <p:spPr>
+          <a:xfrm>
+            <a:off x="594360" y="4720849"/>
+            <a:ext cx="384048" cy="360950"/>
+          </a:xfrm>
+          <a:prstGeom prst="ellipse">
+            <a:avLst/>
+          </a:prstGeom>
+          <a:solidFill>
+            <a:srgbClr val="203864"/>
+          </a:solidFill>
+          <a:ln>
+            <a:noFill/>
+          </a:ln>
+          <a:effectLst/>
+        </p:spPr>
+        <p:txBody>
+          <a:bodyPr rtlCol="0" anchor="ctr" wrap="square" lIns="54864" rIns="54864" tIns="27432" bIns="27432"/>
+          <a:lstStyle/>
+          <a:p>
+            <a:pPr algn="ctr" eaLnBrk="0">
+              <a:lnSpc>
+                <a:spcPct val="95000"/>
+              </a:lnSpc>
+              <a:spcBef>
+                <a:spcPts val="0"/>
+              </a:spcBef>
+              <a:spcAft>
+                <a:spcPts val="0"/>
+              </a:spcAft>
+              <a:buNone/>
+            </a:pPr>
+            <a:r>
+              <a:rPr sz="2100" b="1" i="0" lang="ko-KR" altLang="en-US">
+                <a:solidFill>
+                  <a:srgbClr val="FFFFFF"/>
+                </a:solidFill>
+                <a:latin typeface="맑은 고딕"/>
+                <a:ea typeface="맑은 고딕"/>
+                <a:cs typeface="맑은 고딕"/>
+              </a:rPr>
+              <a:t>3</a:t>
+            </a:r>
+          </a:p>
+        </p:txBody>
+      </p:sp>
+      <p:sp>
+        <p:nvSpPr>
+          <p:cNvPr id="22" name="TextBox 22"/>
+          <p:cNvSpPr txBox="1"/>
+          <p:nvPr/>
+        </p:nvSpPr>
+        <p:spPr>
+          <a:xfrm>
+            <a:off x="1170432" y="4712255"/>
+            <a:ext cx="7296912" cy="800000"/>
+          </a:xfrm>
+          <a:prstGeom prst="rect">
+            <a:avLst/>
+          </a:prstGeom>
+          <a:noFill/>
+        </p:spPr>
+        <p:txBody>
+          <a:bodyPr wrap="square" lIns="0" rIns="0" tIns="0" bIns="0" anchor="t">
+            <a:spAutoFit/>
+          </a:bodyPr>
+          <a:lstStyle/>
+          <a:p>
+            <a:pPr algn="l" eaLnBrk="0">
+              <a:lnSpc>
+                <a:spcPct val="95000"/>
+              </a:lnSpc>
+              <a:spcBef>
+                <a:spcPts val="0"/>
+              </a:spcBef>
+              <a:spcAft>
+                <a:spcPts val="200"/>
+              </a:spcAft>
+              <a:buNone/>
+            </a:pPr>
+            <a:r>
+              <a:rPr sz="2200" b="1" i="0" lang="ko-KR" altLang="en-US">
+                <a:solidFill>
+                  <a:srgbClr val="203864"/>
+                </a:solidFill>
+                <a:latin typeface="맑은 고딕"/>
+                <a:ea typeface="맑은 고딕"/>
+                <a:cs typeface="맑은 고딕"/>
+              </a:rPr>
+              <a:t>평형 — 오가는 수가 같다</a:t>
+            </a:r>
+          </a:p>
+          <a:p>
+            <a:pPr algn="l" eaLnBrk="0">
+              <a:lnSpc>
+                <a:spcPct val="95000"/>
+              </a:lnSpc>
+              <a:spcBef>
+                <a:spcPts val="0"/>
+              </a:spcBef>
+              <a:spcAft>
+                <a:spcPts val="0"/>
+              </a:spcAft>
+              <a:buNone/>
+            </a:pPr>
+            <a:r>
+              <a:rPr sz="2100" b="0" i="0" lang="ko-KR" altLang="en-US">
+                <a:solidFill>
+                  <a:srgbClr val="1A1A1A"/>
+                </a:solidFill>
+                <a:latin typeface="맑은 고딕"/>
+                <a:ea typeface="맑은 고딕"/>
+                <a:cs typeface="맑은 고딕"/>
+              </a:rPr>
+              <a:t>평형은 '아무 일도 없음' 이 아니라 '알짜가 0'</a:t>
+            </a:r>
+          </a:p>
+        </p:txBody>
+      </p:sp>
+      <p:pic>
+        <p:nvPicPr>
+          <p:cNvPr id="23" name="EQS003"/>
+          <p:cNvPicPr>
+            <a:picLocks noChangeAspect="1"/>
+          </p:cNvPicPr>
+          <p:nvPr/>
+        </p:nvPicPr>
+        <p:blipFill>
+          <a:blip r:embed="rId12"/>
+          <a:stretch>
+            <a:fillRect/>
+          </a:stretch>
+        </p:blipFill>
+        <p:spPr>
+          <a:xfrm>
+            <a:off x="1225387" y="5771859"/>
+            <a:ext cx="4012800" cy="427500"/>
+          </a:xfrm>
+          <a:prstGeom prst="rect">
+            <a:avLst/>
+          </a:prstGeom>
+        </p:spPr>
+      </p:pic>
+      <p:sp>
+        <p:nvSpPr>
+          <p:cNvPr id="24" name="TextBox 24"/>
+          <p:cNvSpPr txBox="1"/>
+          <p:nvPr/>
+        </p:nvSpPr>
+        <p:spPr>
+          <a:xfrm>
+            <a:off x="5418187" y="5820609"/>
+            <a:ext cx="1700000" cy="330000"/>
+          </a:xfrm>
+          <a:prstGeom prst="rect">
+            <a:avLst/>
+          </a:prstGeom>
+          <a:noFill/>
+        </p:spPr>
+        <p:txBody>
+          <a:bodyPr wrap="square" lIns="0" rIns="0" tIns="0" bIns="0" anchor="t">
+            <a:spAutoFit/>
+          </a:bodyPr>
+          <a:lstStyle/>
+          <a:p>
+            <a:pPr algn="l" eaLnBrk="0">
+              <a:lnSpc>
+                <a:spcPct val="95000"/>
+              </a:lnSpc>
+              <a:spcBef>
+                <a:spcPts val="0"/>
+              </a:spcBef>
+              <a:spcAft>
+                <a:spcPts val="0"/>
+              </a:spcAft>
+              <a:buNone/>
+            </a:pPr>
+            <a:r>
+              <a:rPr sz="2100" b="0" i="0" lang="ko-KR" altLang="en-US">
+                <a:solidFill>
+                  <a:srgbClr val="C00000"/>
+                </a:solidFill>
+                <a:latin typeface="맑은 고딕"/>
+                <a:ea typeface="맑은 고딕"/>
+                <a:cs typeface="맑은 고딕"/>
+              </a:rPr>
+              <a:t>식 (3-55)</a:t>
+            </a:r>
+          </a:p>
+        </p:txBody>
+      </p:sp>
+    </p:spTree>
+  </p:cSld>
+  <p:clrMapOvr>
+    <a:masterClrMapping/>
+  </p:clrMapOvr>
+</p:sld>
+</file>
+
+<file path=ppt/slides/slide67.xml><?xml version="1.0" encoding="utf-8"?>
+<p:sld xmlns:a="http://schemas.openxmlformats.org/drawingml/2006/main" xmlns:p="http://schemas.openxmlformats.org/presentationml/2006/main" xmlns:r="http://schemas.openxmlformats.org/officeDocument/2006/relationships">
+  <p:cSld>
+    <p:spTree>
+      <p:nvGrpSpPr>
+        <p:cNvPr id="1" name=""/>
+        <p:cNvGrpSpPr/>
+        <p:nvPr/>
+      </p:nvGrpSpPr>
+      <p:grpSpPr/>
+      <p:sp>
+        <p:nvSpPr>
+          <p:cNvPr id="2" name="Title 1"/>
+          <p:cNvSpPr>
+            <a:spLocks noGrp="1"/>
+          </p:cNvSpPr>
+          <p:nvPr>
+            <p:ph type="title"/>
+          </p:nvPr>
+        </p:nvSpPr>
+        <p:spPr>
+          <a:xfrm>
+            <a:off x="274320" y="118872"/>
+            <a:ext cx="8595360" cy="749808"/>
+          </a:xfrm>
+        </p:spPr>
+        <p:txBody>
+          <a:bodyPr wrap="square"/>
+          <a:lstStyle/>
+          <a:p>
+            <a:r>
+              <a:rPr sz="3000" b="1" i="0" lang="ko-KR" altLang="en-US">
+                <a:solidFill>
+                  <a:srgbClr val="203864"/>
+                </a:solidFill>
+                <a:latin typeface="돋움"/>
+                <a:ea typeface="돋움"/>
+                <a:cs typeface="돋움"/>
+              </a:rPr>
+              <a:t>[보충] E</a:t>
+            </a:r>
+            <a:r>
+              <a:rPr sz="3000" b="1" i="1" baseline="-25000" lang="ko-KR" altLang="en-US">
+                <a:solidFill>
+                  <a:srgbClr val="203864"/>
+                </a:solidFill>
+                <a:latin typeface="돋움"/>
+                <a:ea typeface="돋움"/>
+                <a:cs typeface="돋움"/>
+              </a:rPr>
+              <a:t>F</a:t>
+            </a:r>
+            <a:r>
+              <a:rPr sz="3000" b="1" i="0" lang="ko-KR" altLang="en-US">
+                <a:solidFill>
+                  <a:srgbClr val="203864"/>
+                </a:solidFill>
+                <a:latin typeface="돋움"/>
+                <a:ea typeface="돋움"/>
+                <a:cs typeface="돋움"/>
+              </a:rPr>
+              <a:t> 가 하나가 되는 식 (2/2)</a:t>
+            </a:r>
+          </a:p>
+        </p:txBody>
+      </p:sp>
+      <p:sp>
+        <p:nvSpPr>
+          <p:cNvPr id="3" name="TextBox 2"/>
+          <p:cNvSpPr txBox="1"/>
+          <p:nvPr/>
+        </p:nvSpPr>
+        <p:spPr>
+          <a:xfrm>
+            <a:off x="457200" y="6382512"/>
+            <a:ext cx="4206240" cy="329184"/>
+          </a:xfrm>
+          <a:prstGeom prst="rect">
+            <a:avLst/>
+          </a:prstGeom>
+          <a:noFill/>
+        </p:spPr>
+        <p:txBody>
+          <a:bodyPr wrap="none" lIns="0" rIns="0" tIns="0" bIns="0">
+            <a:spAutoFit/>
+          </a:bodyPr>
+          <a:lstStyle/>
+          <a:p>
+            <a:pPr algn="l"/>
+            <a:r>
+              <a:rPr sz="1600" lang="ko-KR" altLang="en-US">
+                <a:solidFill>
+                  <a:srgbClr val="6E6E6E"/>
+                </a:solidFill>
+                <a:latin typeface="Arial"/>
+                <a:ea typeface="맑은 고딕"/>
+                <a:cs typeface="맑은 고딕"/>
+              </a:rPr>
+              <a:t>Generated by Claude</a:t>
+            </a:r>
+          </a:p>
+        </p:txBody>
+      </p:sp>
+      <p:sp>
+        <p:nvSpPr>
+          <p:cNvPr id="4" name="TextBox 3"/>
+          <p:cNvSpPr txBox="1"/>
+          <p:nvPr/>
+        </p:nvSpPr>
+        <p:spPr>
+          <a:xfrm>
+            <a:off x="475488" y="877824"/>
+            <a:ext cx="8229600" cy="310896"/>
+          </a:xfrm>
+          <a:prstGeom prst="rect">
+            <a:avLst/>
+          </a:prstGeom>
+          <a:noFill/>
+        </p:spPr>
+        <p:txBody>
+          <a:bodyPr wrap="square" lIns="0" rIns="0" tIns="0" bIns="0" anchor="t">
+            <a:spAutoFit/>
+          </a:bodyPr>
+          <a:lstStyle/>
+          <a:p>
+            <a:pPr algn="l" eaLnBrk="0">
+              <a:lnSpc>
+                <a:spcPct val="95000"/>
+              </a:lnSpc>
+              <a:spcBef>
+                <a:spcPts val="0"/>
+              </a:spcBef>
+              <a:spcAft>
+                <a:spcPts val="0"/>
+              </a:spcAft>
+              <a:buNone/>
+            </a:pPr>
+            <a:r>
+              <a:rPr sz="2100" b="0" i="0" lang="ko-KR" altLang="en-US">
+                <a:solidFill>
+                  <a:srgbClr val="595959"/>
+                </a:solidFill>
+                <a:latin typeface="맑은 고딕"/>
+                <a:ea typeface="맑은 고딕"/>
+                <a:cs typeface="맑은 고딕"/>
+              </a:rPr>
+              <a:t>[보충] 식 (3-56) ~ (3-58) · 상태밀도가 통째로 빠지는 것이 핵심</a:t>
+            </a:r>
+          </a:p>
+        </p:txBody>
+      </p:sp>
+      <p:sp>
+        <p:nvSpPr>
+          <p:cNvPr id="10" name="Card 10"/>
+          <p:cNvSpPr/>
+          <p:nvPr/>
+        </p:nvSpPr>
+        <p:spPr>
+          <a:xfrm>
+            <a:off x="457200" y="1188720"/>
+            <a:ext cx="8229600" cy="1691639"/>
+          </a:xfrm>
+          <a:prstGeom prst="roundRect">
+            <a:avLst>
+              <a:gd name="adj" fmla="val 8000"/>
+            </a:avLst>
+          </a:prstGeom>
+          <a:solidFill>
+            <a:srgbClr val="F4F4F6"/>
+          </a:solidFill>
+          <a:ln>
+            <a:noFill/>
+          </a:ln>
+          <a:effectLst/>
+        </p:spPr>
+        <p:txBody>
+          <a:bodyPr rtlCol="0" anchor="ctr" wrap="square" lIns="54864" rIns="54864" tIns="27432" bIns="27432"/>
+          <a:lstStyle/>
+          <a:p>
+            <a:pPr algn="ctr"/>
+          </a:p>
+        </p:txBody>
+      </p:sp>
+      <p:sp>
+        <p:nvSpPr>
+          <p:cNvPr id="11" name="Oval 11"/>
+          <p:cNvSpPr/>
+          <p:nvPr/>
+        </p:nvSpPr>
+        <p:spPr>
+          <a:xfrm>
+            <a:off x="594360" y="1291849"/>
+            <a:ext cx="384048" cy="360950"/>
+          </a:xfrm>
+          <a:prstGeom prst="ellipse">
+            <a:avLst/>
+          </a:prstGeom>
+          <a:solidFill>
+            <a:srgbClr val="203864"/>
+          </a:solidFill>
+          <a:ln>
+            <a:noFill/>
+          </a:ln>
+          <a:effectLst/>
+        </p:spPr>
+        <p:txBody>
+          <a:bodyPr rtlCol="0" anchor="ctr" wrap="square" lIns="54864" rIns="54864" tIns="27432" bIns="27432"/>
+          <a:lstStyle/>
+          <a:p>
+            <a:pPr algn="ctr" eaLnBrk="0">
+              <a:lnSpc>
+                <a:spcPct val="95000"/>
+              </a:lnSpc>
+              <a:spcBef>
+                <a:spcPts val="0"/>
+              </a:spcBef>
+              <a:spcAft>
+                <a:spcPts val="0"/>
+              </a:spcAft>
+              <a:buNone/>
+            </a:pPr>
+            <a:r>
+              <a:rPr sz="2100" b="1" i="0" lang="ko-KR" altLang="en-US">
+                <a:solidFill>
+                  <a:srgbClr val="FFFFFF"/>
+                </a:solidFill>
+                <a:latin typeface="맑은 고딕"/>
+                <a:ea typeface="맑은 고딕"/>
+                <a:cs typeface="맑은 고딕"/>
+              </a:rPr>
+              <a:t>1</a:t>
+            </a:r>
+          </a:p>
+        </p:txBody>
+      </p:sp>
+      <p:sp>
+        <p:nvSpPr>
+          <p:cNvPr id="12" name="TextBox 12"/>
+          <p:cNvSpPr txBox="1"/>
+          <p:nvPr/>
+        </p:nvSpPr>
+        <p:spPr>
+          <a:xfrm>
+            <a:off x="1170432" y="1283255"/>
+            <a:ext cx="7296912" cy="800000"/>
+          </a:xfrm>
+          <a:prstGeom prst="rect">
+            <a:avLst/>
+          </a:prstGeom>
+          <a:noFill/>
+        </p:spPr>
+        <p:txBody>
+          <a:bodyPr wrap="square" lIns="0" rIns="0" tIns="0" bIns="0" anchor="t">
+            <a:spAutoFit/>
+          </a:bodyPr>
+          <a:lstStyle/>
+          <a:p>
+            <a:pPr algn="l" eaLnBrk="0">
+              <a:lnSpc>
+                <a:spcPct val="95000"/>
+              </a:lnSpc>
+              <a:spcBef>
+                <a:spcPts val="0"/>
+              </a:spcBef>
+              <a:spcAft>
+                <a:spcPts val="200"/>
+              </a:spcAft>
+              <a:buNone/>
+            </a:pPr>
+            <a:r>
+              <a:rPr sz="2200" b="1" i="0" lang="ko-KR" altLang="en-US">
+                <a:solidFill>
+                  <a:srgbClr val="203864"/>
+                </a:solidFill>
+                <a:latin typeface="맑은 고딕"/>
+                <a:ea typeface="맑은 고딕"/>
+                <a:cs typeface="맑은 고딕"/>
+              </a:rPr>
+              <a:t>괄호를 풀면 곱항이 지워진다</a:t>
+            </a:r>
+          </a:p>
+          <a:p>
+            <a:pPr algn="l" eaLnBrk="0">
+              <a:lnSpc>
+                <a:spcPct val="95000"/>
+              </a:lnSpc>
+              <a:spcBef>
+                <a:spcPts val="0"/>
+              </a:spcBef>
+              <a:spcAft>
+                <a:spcPts val="0"/>
+              </a:spcAft>
+              <a:buNone/>
+            </a:pPr>
+            <a:r>
+              <a:rPr sz="2100" b="0" i="0" lang="ko-KR" altLang="en-US">
+                <a:solidFill>
+                  <a:srgbClr val="1A1A1A"/>
+                </a:solidFill>
+                <a:latin typeface="맑은 고딕"/>
+                <a:ea typeface="맑은 고딕"/>
+                <a:cs typeface="맑은 고딕"/>
+              </a:rPr>
+              <a:t>양변에 똑같이 있는 </a:t>
+            </a:r>
+            <a:r>
+              <a:rPr sz="2100" b="0" i="1" lang="ko-KR" altLang="en-US">
+                <a:solidFill>
+                  <a:srgbClr val="1A1A1A"/>
+                </a:solidFill>
+                <a:latin typeface="맑은 고딕"/>
+                <a:ea typeface="맑은 고딕"/>
+                <a:cs typeface="맑은 고딕"/>
+              </a:rPr>
+              <a:t>N</a:t>
+            </a:r>
+            <a:r>
+              <a:rPr sz="2100" b="0" i="1" baseline="-25000" lang="ko-KR" altLang="en-US">
+                <a:solidFill>
+                  <a:srgbClr val="1A1A1A"/>
+                </a:solidFill>
+                <a:latin typeface="맑은 고딕"/>
+                <a:ea typeface="맑은 고딕"/>
+                <a:cs typeface="맑은 고딕"/>
+              </a:rPr>
+              <a:t>1</a:t>
+            </a:r>
+            <a:r>
+              <a:rPr sz="2100" b="0" i="1" lang="ko-KR" altLang="en-US">
+                <a:solidFill>
+                  <a:srgbClr val="1A1A1A"/>
+                </a:solidFill>
+                <a:latin typeface="맑은 고딕"/>
+                <a:ea typeface="맑은 고딕"/>
+                <a:cs typeface="맑은 고딕"/>
+              </a:rPr>
+              <a:t>N</a:t>
+            </a:r>
+            <a:r>
+              <a:rPr sz="2100" b="0" i="1" baseline="-25000" lang="ko-KR" altLang="en-US">
+                <a:solidFill>
+                  <a:srgbClr val="1A1A1A"/>
+                </a:solidFill>
+                <a:latin typeface="맑은 고딕"/>
+                <a:ea typeface="맑은 고딕"/>
+                <a:cs typeface="맑은 고딕"/>
+              </a:rPr>
+              <a:t>2</a:t>
+            </a:r>
+            <a:r>
+              <a:rPr sz="2100" b="0" i="1" lang="ko-KR" altLang="en-US">
+                <a:solidFill>
+                  <a:srgbClr val="1A1A1A"/>
+                </a:solidFill>
+                <a:latin typeface="맑은 고딕"/>
+                <a:ea typeface="맑은 고딕"/>
+                <a:cs typeface="맑은 고딕"/>
+              </a:rPr>
+              <a:t> f</a:t>
+            </a:r>
+            <a:r>
+              <a:rPr sz="2100" b="0" i="1" baseline="-25000" lang="ko-KR" altLang="en-US">
+                <a:solidFill>
+                  <a:srgbClr val="1A1A1A"/>
+                </a:solidFill>
+                <a:latin typeface="맑은 고딕"/>
+                <a:ea typeface="맑은 고딕"/>
+                <a:cs typeface="맑은 고딕"/>
+              </a:rPr>
+              <a:t>1</a:t>
+            </a:r>
+            <a:r>
+              <a:rPr sz="2100" b="0" i="1" lang="ko-KR" altLang="en-US">
+                <a:solidFill>
+                  <a:srgbClr val="1A1A1A"/>
+                </a:solidFill>
+                <a:latin typeface="맑은 고딕"/>
+                <a:ea typeface="맑은 고딕"/>
+                <a:cs typeface="맑은 고딕"/>
+              </a:rPr>
+              <a:t>f</a:t>
+            </a:r>
+            <a:r>
+              <a:rPr sz="2100" b="0" i="1" baseline="-25000" lang="ko-KR" altLang="en-US">
+                <a:solidFill>
+                  <a:srgbClr val="1A1A1A"/>
+                </a:solidFill>
+                <a:latin typeface="맑은 고딕"/>
+                <a:ea typeface="맑은 고딕"/>
+                <a:cs typeface="맑은 고딕"/>
+              </a:rPr>
+              <a:t>2</a:t>
+            </a:r>
+            <a:r>
+              <a:rPr sz="2100" b="0" i="0" lang="ko-KR" altLang="en-US">
+                <a:solidFill>
+                  <a:srgbClr val="1A1A1A"/>
+                </a:solidFill>
+                <a:latin typeface="맑은 고딕"/>
+                <a:ea typeface="맑은 고딕"/>
+                <a:cs typeface="맑은 고딕"/>
+              </a:rPr>
+              <a:t> 가 상쇄된다</a:t>
+            </a:r>
+          </a:p>
+        </p:txBody>
+      </p:sp>
+      <p:pic>
+        <p:nvPicPr>
+          <p:cNvPr id="13" name="EQS001"/>
+          <p:cNvPicPr>
+            <a:picLocks noChangeAspect="1"/>
+          </p:cNvPicPr>
+          <p:nvPr/>
+        </p:nvPicPr>
+        <p:blipFill>
+          <a:blip r:embed="rId10"/>
+          <a:stretch>
+            <a:fillRect/>
+          </a:stretch>
+        </p:blipFill>
+        <p:spPr>
+          <a:xfrm>
+            <a:off x="1225387" y="2342859"/>
+            <a:ext cx="4123000" cy="427500"/>
+          </a:xfrm>
+          <a:prstGeom prst="rect">
+            <a:avLst/>
+          </a:prstGeom>
+        </p:spPr>
+      </p:pic>
+      <p:sp>
+        <p:nvSpPr>
+          <p:cNvPr id="14" name="TextBox 14"/>
+          <p:cNvSpPr txBox="1"/>
+          <p:nvPr/>
+        </p:nvSpPr>
+        <p:spPr>
+          <a:xfrm>
+            <a:off x="5528387" y="2391609"/>
+            <a:ext cx="1700000" cy="330000"/>
+          </a:xfrm>
+          <a:prstGeom prst="rect">
+            <a:avLst/>
+          </a:prstGeom>
+          <a:noFill/>
+        </p:spPr>
+        <p:txBody>
+          <a:bodyPr wrap="square" lIns="0" rIns="0" tIns="0" bIns="0" anchor="t">
+            <a:spAutoFit/>
+          </a:bodyPr>
+          <a:lstStyle/>
+          <a:p>
+            <a:pPr algn="l" eaLnBrk="0">
+              <a:lnSpc>
+                <a:spcPct val="95000"/>
+              </a:lnSpc>
+              <a:spcBef>
+                <a:spcPts val="0"/>
+              </a:spcBef>
+              <a:spcAft>
+                <a:spcPts val="0"/>
+              </a:spcAft>
+              <a:buNone/>
+            </a:pPr>
+            <a:r>
+              <a:rPr sz="2100" b="0" i="0" lang="ko-KR" altLang="en-US">
+                <a:solidFill>
+                  <a:srgbClr val="C00000"/>
+                </a:solidFill>
+                <a:latin typeface="맑은 고딕"/>
+                <a:ea typeface="맑은 고딕"/>
+                <a:cs typeface="맑은 고딕"/>
+              </a:rPr>
+              <a:t>식 (3-56)</a:t>
+            </a:r>
+          </a:p>
+        </p:txBody>
+      </p:sp>
+      <p:sp>
+        <p:nvSpPr>
+          <p:cNvPr id="15" name="Card 15"/>
+          <p:cNvSpPr/>
+          <p:nvPr/>
+        </p:nvSpPr>
+        <p:spPr>
+          <a:xfrm>
+            <a:off x="457200" y="2903220"/>
+            <a:ext cx="8229600" cy="1691639"/>
+          </a:xfrm>
+          <a:prstGeom prst="roundRect">
+            <a:avLst>
+              <a:gd name="adj" fmla="val 8000"/>
+            </a:avLst>
+          </a:prstGeom>
+          <a:solidFill>
+            <a:srgbClr val="F4F4F6"/>
+          </a:solidFill>
+          <a:ln>
+            <a:noFill/>
+          </a:ln>
+          <a:effectLst/>
+        </p:spPr>
+        <p:txBody>
+          <a:bodyPr rtlCol="0" anchor="ctr" wrap="square" lIns="54864" rIns="54864" tIns="27432" bIns="27432"/>
+          <a:lstStyle/>
+          <a:p>
+            <a:pPr algn="ctr"/>
+          </a:p>
+        </p:txBody>
+      </p:sp>
+      <p:sp>
+        <p:nvSpPr>
+          <p:cNvPr id="16" name="Oval 16"/>
+          <p:cNvSpPr/>
+          <p:nvPr/>
+        </p:nvSpPr>
+        <p:spPr>
+          <a:xfrm>
+            <a:off x="594360" y="3006349"/>
+            <a:ext cx="384048" cy="360950"/>
+          </a:xfrm>
+          <a:prstGeom prst="ellipse">
+            <a:avLst/>
+          </a:prstGeom>
+          <a:solidFill>
+            <a:srgbClr val="203864"/>
+          </a:solidFill>
+          <a:ln>
+            <a:noFill/>
+          </a:ln>
+          <a:effectLst/>
+        </p:spPr>
+        <p:txBody>
+          <a:bodyPr rtlCol="0" anchor="ctr" wrap="square" lIns="54864" rIns="54864" tIns="27432" bIns="27432"/>
+          <a:lstStyle/>
+          <a:p>
+            <a:pPr algn="ctr" eaLnBrk="0">
+              <a:lnSpc>
+                <a:spcPct val="95000"/>
+              </a:lnSpc>
+              <a:spcBef>
+                <a:spcPts val="0"/>
+              </a:spcBef>
+              <a:spcAft>
+                <a:spcPts val="0"/>
+              </a:spcAft>
+              <a:buNone/>
+            </a:pPr>
+            <a:r>
+              <a:rPr sz="2100" b="1" i="0" lang="ko-KR" altLang="en-US">
+                <a:solidFill>
+                  <a:srgbClr val="FFFFFF"/>
+                </a:solidFill>
+                <a:latin typeface="맑은 고딕"/>
+                <a:ea typeface="맑은 고딕"/>
+                <a:cs typeface="맑은 고딕"/>
+              </a:rPr>
+              <a:t>2</a:t>
+            </a:r>
+          </a:p>
+        </p:txBody>
+      </p:sp>
+      <p:sp>
+        <p:nvSpPr>
+          <p:cNvPr id="17" name="TextBox 17"/>
+          <p:cNvSpPr txBox="1"/>
+          <p:nvPr/>
+        </p:nvSpPr>
+        <p:spPr>
+          <a:xfrm>
+            <a:off x="1170432" y="2997755"/>
+            <a:ext cx="7296912" cy="800000"/>
+          </a:xfrm>
+          <a:prstGeom prst="rect">
+            <a:avLst/>
+          </a:prstGeom>
+          <a:noFill/>
+        </p:spPr>
+        <p:txBody>
+          <a:bodyPr wrap="square" lIns="0" rIns="0" tIns="0" bIns="0" anchor="t">
+            <a:spAutoFit/>
+          </a:bodyPr>
+          <a:lstStyle/>
+          <a:p>
+            <a:pPr algn="l" eaLnBrk="0">
+              <a:lnSpc>
+                <a:spcPct val="95000"/>
+              </a:lnSpc>
+              <a:spcBef>
+                <a:spcPts val="0"/>
+              </a:spcBef>
+              <a:spcAft>
+                <a:spcPts val="200"/>
+              </a:spcAft>
+              <a:buNone/>
+            </a:pPr>
+            <a:r>
+              <a:rPr sz="2200" b="1" i="0" lang="ko-KR" altLang="en-US">
+                <a:solidFill>
+                  <a:srgbClr val="203864"/>
+                </a:solidFill>
+                <a:latin typeface="맑은 고딕"/>
+                <a:ea typeface="맑은 고딕"/>
+                <a:cs typeface="맑은 고딕"/>
+              </a:rPr>
+              <a:t>상태밀도가 통째로 빠진다</a:t>
+            </a:r>
+          </a:p>
+          <a:p>
+            <a:pPr algn="l" eaLnBrk="0">
+              <a:lnSpc>
+                <a:spcPct val="95000"/>
+              </a:lnSpc>
+              <a:spcBef>
+                <a:spcPts val="0"/>
+              </a:spcBef>
+              <a:spcAft>
+                <a:spcPts val="0"/>
+              </a:spcAft>
+              <a:buNone/>
+            </a:pPr>
+            <a:r>
+              <a:rPr sz="2100" b="0" i="0" lang="ko-KR" altLang="en-US">
+                <a:solidFill>
+                  <a:srgbClr val="1A1A1A"/>
+                </a:solidFill>
+                <a:latin typeface="맑은 고딕"/>
+                <a:ea typeface="맑은 고딕"/>
+                <a:cs typeface="맑은 고딕"/>
+              </a:rPr>
+              <a:t>N 은 0 이 아니므로 — 두 물질의 N 이 달라도 결론은 같다</a:t>
+            </a:r>
+          </a:p>
+        </p:txBody>
+      </p:sp>
+      <p:pic>
+        <p:nvPicPr>
+          <p:cNvPr id="18" name="EQS002"/>
+          <p:cNvPicPr>
+            <a:picLocks noChangeAspect="1"/>
+          </p:cNvPicPr>
+          <p:nvPr/>
+        </p:nvPicPr>
+        <p:blipFill>
+          <a:blip r:embed="rId11"/>
+          <a:stretch>
+            <a:fillRect/>
+          </a:stretch>
+        </p:blipFill>
+        <p:spPr>
+          <a:xfrm>
+            <a:off x="1225387" y="4057359"/>
+            <a:ext cx="4605600" cy="427500"/>
+          </a:xfrm>
+          <a:prstGeom prst="rect">
+            <a:avLst/>
+          </a:prstGeom>
+        </p:spPr>
+      </p:pic>
+      <p:sp>
+        <p:nvSpPr>
+          <p:cNvPr id="19" name="TextBox 19"/>
+          <p:cNvSpPr txBox="1"/>
+          <p:nvPr/>
+        </p:nvSpPr>
+        <p:spPr>
+          <a:xfrm>
+            <a:off x="6010987" y="4106109"/>
+            <a:ext cx="1700000" cy="330000"/>
+          </a:xfrm>
+          <a:prstGeom prst="rect">
+            <a:avLst/>
+          </a:prstGeom>
+          <a:noFill/>
+        </p:spPr>
+        <p:txBody>
+          <a:bodyPr wrap="square" lIns="0" rIns="0" tIns="0" bIns="0" anchor="t">
+            <a:spAutoFit/>
+          </a:bodyPr>
+          <a:lstStyle/>
+          <a:p>
+            <a:pPr algn="l" eaLnBrk="0">
+              <a:lnSpc>
+                <a:spcPct val="95000"/>
+              </a:lnSpc>
+              <a:spcBef>
+                <a:spcPts val="0"/>
+              </a:spcBef>
+              <a:spcAft>
+                <a:spcPts val="0"/>
+              </a:spcAft>
+              <a:buNone/>
+            </a:pPr>
+            <a:r>
+              <a:rPr sz="2100" b="0" i="0" lang="ko-KR" altLang="en-US">
+                <a:solidFill>
+                  <a:srgbClr val="C00000"/>
+                </a:solidFill>
+                <a:latin typeface="맑은 고딕"/>
+                <a:ea typeface="맑은 고딕"/>
+                <a:cs typeface="맑은 고딕"/>
+              </a:rPr>
+              <a:t>식 (3-57)</a:t>
+            </a:r>
+          </a:p>
+        </p:txBody>
+      </p:sp>
+      <p:sp>
+        <p:nvSpPr>
+          <p:cNvPr id="20" name="Card 20"/>
+          <p:cNvSpPr/>
+          <p:nvPr/>
+        </p:nvSpPr>
+        <p:spPr>
+          <a:xfrm>
+            <a:off x="457200" y="4617720"/>
+            <a:ext cx="8229600" cy="1691639"/>
+          </a:xfrm>
+          <a:prstGeom prst="roundRect">
+            <a:avLst>
+              <a:gd name="adj" fmla="val 8000"/>
+            </a:avLst>
+          </a:prstGeom>
+          <a:solidFill>
+            <a:srgbClr val="F4F4F6"/>
+          </a:solidFill>
+          <a:ln>
+            <a:noFill/>
+          </a:ln>
+          <a:effectLst/>
+        </p:spPr>
+        <p:txBody>
+          <a:bodyPr rtlCol="0" anchor="ctr" wrap="square" lIns="54864" rIns="54864" tIns="27432" bIns="27432"/>
+          <a:lstStyle/>
+          <a:p>
+            <a:pPr algn="ctr"/>
+          </a:p>
+        </p:txBody>
+      </p:sp>
+      <p:sp>
+        <p:nvSpPr>
+          <p:cNvPr id="21" name="Oval 21"/>
+          <p:cNvSpPr/>
+          <p:nvPr/>
+        </p:nvSpPr>
+        <p:spPr>
+          <a:xfrm>
+            <a:off x="594360" y="4720849"/>
+            <a:ext cx="384048" cy="360950"/>
+          </a:xfrm>
+          <a:prstGeom prst="ellipse">
+            <a:avLst/>
+          </a:prstGeom>
+          <a:solidFill>
+            <a:srgbClr val="203864"/>
+          </a:solidFill>
+          <a:ln>
+            <a:noFill/>
+          </a:ln>
+          <a:effectLst/>
+        </p:spPr>
+        <p:txBody>
+          <a:bodyPr rtlCol="0" anchor="ctr" wrap="square" lIns="54864" rIns="54864" tIns="27432" bIns="27432"/>
+          <a:lstStyle/>
+          <a:p>
+            <a:pPr algn="ctr" eaLnBrk="0">
+              <a:lnSpc>
+                <a:spcPct val="95000"/>
+              </a:lnSpc>
+              <a:spcBef>
+                <a:spcPts val="0"/>
+              </a:spcBef>
+              <a:spcAft>
+                <a:spcPts val="0"/>
+              </a:spcAft>
+              <a:buNone/>
+            </a:pPr>
+            <a:r>
+              <a:rPr sz="2100" b="1" i="0" lang="ko-KR" altLang="en-US">
+                <a:solidFill>
+                  <a:srgbClr val="FFFFFF"/>
+                </a:solidFill>
+                <a:latin typeface="맑은 고딕"/>
+                <a:ea typeface="맑은 고딕"/>
+                <a:cs typeface="맑은 고딕"/>
+              </a:rPr>
+              <a:t>3</a:t>
+            </a:r>
+          </a:p>
+        </p:txBody>
+      </p:sp>
+      <p:sp>
+        <p:nvSpPr>
+          <p:cNvPr id="22" name="TextBox 22"/>
+          <p:cNvSpPr txBox="1"/>
+          <p:nvPr/>
+        </p:nvSpPr>
+        <p:spPr>
+          <a:xfrm>
+            <a:off x="1170432" y="4712255"/>
+            <a:ext cx="7296912" cy="800000"/>
+          </a:xfrm>
+          <a:prstGeom prst="rect">
+            <a:avLst/>
+          </a:prstGeom>
+          <a:noFill/>
+        </p:spPr>
+        <p:txBody>
+          <a:bodyPr wrap="square" lIns="0" rIns="0" tIns="0" bIns="0" anchor="t">
+            <a:spAutoFit/>
+          </a:bodyPr>
+          <a:lstStyle/>
+          <a:p>
+            <a:pPr algn="l" eaLnBrk="0">
+              <a:lnSpc>
+                <a:spcPct val="95000"/>
+              </a:lnSpc>
+              <a:spcBef>
+                <a:spcPts val="0"/>
+              </a:spcBef>
+              <a:spcAft>
+                <a:spcPts val="200"/>
+              </a:spcAft>
+              <a:buNone/>
+            </a:pPr>
+            <a:r>
+              <a:rPr sz="2200" b="1" i="0" lang="ko-KR" altLang="en-US">
+                <a:solidFill>
+                  <a:srgbClr val="203864"/>
+                </a:solidFill>
+                <a:latin typeface="맑은 고딕"/>
+                <a:ea typeface="맑은 고딕"/>
+                <a:cs typeface="맑은 고딕"/>
+              </a:rPr>
+              <a:t>f 를 정하는 것은 E</a:t>
+            </a:r>
+            <a:r>
+              <a:rPr sz="2200" b="0" i="1" baseline="-25000" lang="ko-KR" altLang="en-US">
+                <a:solidFill>
+                  <a:srgbClr val="203864"/>
+                </a:solidFill>
+                <a:latin typeface="맑은 고딕"/>
+                <a:ea typeface="맑은 고딕"/>
+                <a:cs typeface="맑은 고딕"/>
+              </a:rPr>
+              <a:t>F</a:t>
+            </a:r>
+            <a:r>
+              <a:rPr sz="2200" b="1" i="0" lang="ko-KR" altLang="en-US">
+                <a:solidFill>
+                  <a:srgbClr val="203864"/>
+                </a:solidFill>
+                <a:latin typeface="맑은 고딕"/>
+                <a:ea typeface="맑은 고딕"/>
+                <a:cs typeface="맑은 고딕"/>
+              </a:rPr>
+              <a:t> 하나뿐</a:t>
+            </a:r>
+          </a:p>
+          <a:p>
+            <a:pPr algn="l" eaLnBrk="0">
+              <a:lnSpc>
+                <a:spcPct val="95000"/>
+              </a:lnSpc>
+              <a:spcBef>
+                <a:spcPts val="0"/>
+              </a:spcBef>
+              <a:spcAft>
+                <a:spcPts val="0"/>
+              </a:spcAft>
+              <a:buNone/>
+            </a:pPr>
+            <a:r>
+              <a:rPr sz="2100" b="0" i="0" lang="ko-KR" altLang="en-US">
+                <a:solidFill>
+                  <a:srgbClr val="1A1A1A"/>
+                </a:solidFill>
+                <a:latin typeface="맑은 고딕"/>
+                <a:ea typeface="맑은 고딕"/>
+                <a:cs typeface="맑은 고딕"/>
+              </a:rPr>
+              <a:t>모든 E 에서 f 가 같으려면 E</a:t>
+            </a:r>
+            <a:r>
+              <a:rPr sz="2100" b="0" i="1" baseline="-25000" lang="ko-KR" altLang="en-US">
+                <a:solidFill>
+                  <a:srgbClr val="1A1A1A"/>
+                </a:solidFill>
+                <a:latin typeface="맑은 고딕"/>
+                <a:ea typeface="맑은 고딕"/>
+                <a:cs typeface="맑은 고딕"/>
+              </a:rPr>
+              <a:t>F</a:t>
+            </a:r>
+            <a:r>
+              <a:rPr sz="2100" b="0" i="0" lang="ko-KR" altLang="en-US">
+                <a:solidFill>
+                  <a:srgbClr val="1A1A1A"/>
+                </a:solidFill>
+                <a:latin typeface="맑은 고딕"/>
+                <a:ea typeface="맑은 고딕"/>
+                <a:cs typeface="맑은 고딕"/>
+              </a:rPr>
+              <a:t> 가 같아야 한다</a:t>
+            </a:r>
+          </a:p>
+        </p:txBody>
+      </p:sp>
+      <p:pic>
+        <p:nvPicPr>
+          <p:cNvPr id="23" name="EQS003"/>
+          <p:cNvPicPr>
+            <a:picLocks noChangeAspect="1"/>
+          </p:cNvPicPr>
+          <p:nvPr/>
+        </p:nvPicPr>
+        <p:blipFill>
+          <a:blip r:embed="rId12"/>
+          <a:stretch>
+            <a:fillRect/>
+          </a:stretch>
+        </p:blipFill>
+        <p:spPr>
+          <a:xfrm>
+            <a:off x="1225387" y="5499359"/>
+            <a:ext cx="2925000" cy="700000"/>
+          </a:xfrm>
+          <a:prstGeom prst="rect">
+            <a:avLst/>
+          </a:prstGeom>
+        </p:spPr>
+      </p:pic>
+      <p:sp>
+        <p:nvSpPr>
+          <p:cNvPr id="24" name="TextBox 24"/>
+          <p:cNvSpPr txBox="1"/>
+          <p:nvPr/>
+        </p:nvSpPr>
+        <p:spPr>
+          <a:xfrm>
+            <a:off x="4330387" y="5684359"/>
+            <a:ext cx="1700000" cy="330000"/>
+          </a:xfrm>
+          <a:prstGeom prst="rect">
+            <a:avLst/>
+          </a:prstGeom>
+          <a:noFill/>
+        </p:spPr>
+        <p:txBody>
+          <a:bodyPr wrap="square" lIns="0" rIns="0" tIns="0" bIns="0" anchor="t">
+            <a:spAutoFit/>
+          </a:bodyPr>
+          <a:lstStyle/>
+          <a:p>
+            <a:pPr algn="l" eaLnBrk="0">
+              <a:lnSpc>
+                <a:spcPct val="95000"/>
+              </a:lnSpc>
+              <a:spcBef>
+                <a:spcPts val="0"/>
+              </a:spcBef>
+              <a:spcAft>
+                <a:spcPts val="0"/>
+              </a:spcAft>
+              <a:buNone/>
+            </a:pPr>
+            <a:r>
+              <a:rPr sz="2100" b="0" i="0" lang="ko-KR" altLang="en-US">
+                <a:solidFill>
+                  <a:srgbClr val="C00000"/>
+                </a:solidFill>
+                <a:latin typeface="맑은 고딕"/>
+                <a:ea typeface="맑은 고딕"/>
+                <a:cs typeface="맑은 고딕"/>
+              </a:rPr>
+              <a:t>식 (3-58)</a:t>
+            </a:r>
+          </a:p>
+        </p:txBody>
+      </p:sp>
+    </p:spTree>
+  </p:cSld>
+  <p:clrMapOvr>
+    <a:masterClrMapping/>
+  </p:clrMapOvr>
+</p:sld>
+</file>
+
+<file path=ppt/slides/slide68.xml><?xml version="1.0" encoding="utf-8"?>
+<p:sld xmlns:a="http://schemas.openxmlformats.org/drawingml/2006/main" xmlns:p="http://schemas.openxmlformats.org/presentationml/2006/main" xmlns:r="http://schemas.openxmlformats.org/officeDocument/2006/relationships">
+  <p:cSld>
+    <p:spTree>
+      <p:nvGrpSpPr>
+        <p:cNvPr id="1" name=""/>
+        <p:cNvGrpSpPr/>
+        <p:nvPr/>
+      </p:nvGrpSpPr>
+      <p:grpSpPr/>
+      <p:sp>
+        <p:nvSpPr>
+          <p:cNvPr id="2" name="Title 1"/>
+          <p:cNvSpPr>
+            <a:spLocks noGrp="1"/>
+          </p:cNvSpPr>
+          <p:nvPr>
+            <p:ph type="title"/>
+          </p:nvPr>
+        </p:nvSpPr>
+        <p:spPr>
+          <a:xfrm>
+            <a:off x="274320" y="118872"/>
+            <a:ext cx="8595360" cy="749808"/>
+          </a:xfrm>
+        </p:spPr>
+        <p:txBody>
+          <a:bodyPr wrap="square"/>
+          <a:lstStyle/>
+          <a:p>
+            <a:r>
+              <a:rPr sz="3000" b="1" i="0" lang="ko-KR" altLang="en-US">
+                <a:solidFill>
+                  <a:srgbClr val="203864"/>
+                </a:solidFill>
+                <a:latin typeface="돋움"/>
+                <a:ea typeface="돋움"/>
+                <a:cs typeface="돋움"/>
+              </a:rPr>
+              <a:t>부록 A16. 자속과 자속밀도의 단위</a:t>
+            </a:r>
+          </a:p>
+        </p:txBody>
+      </p:sp>
+      <p:sp>
+        <p:nvSpPr>
+          <p:cNvPr id="3" name="TextBox 2"/>
+          <p:cNvSpPr txBox="1"/>
+          <p:nvPr/>
+        </p:nvSpPr>
+        <p:spPr>
+          <a:xfrm>
+            <a:off x="457200" y="6382512"/>
+            <a:ext cx="4206240" cy="329184"/>
+          </a:xfrm>
+          <a:prstGeom prst="rect">
+            <a:avLst/>
+          </a:prstGeom>
+          <a:noFill/>
+        </p:spPr>
+        <p:txBody>
+          <a:bodyPr wrap="none" lIns="0" rIns="0" tIns="0" bIns="0">
+            <a:spAutoFit/>
+          </a:bodyPr>
+          <a:lstStyle/>
+          <a:p>
+            <a:pPr algn="l"/>
+            <a:r>
+              <a:rPr sz="1600" lang="ko-KR" altLang="en-US">
+                <a:solidFill>
+                  <a:srgbClr val="6E6E6E"/>
+                </a:solidFill>
+                <a:latin typeface="Arial"/>
+                <a:ea typeface="맑은 고딕"/>
+                <a:cs typeface="맑은 고딕"/>
+              </a:rPr>
+              <a:t>Generated by Claude</a:t>
+            </a:r>
+          </a:p>
+        </p:txBody>
+      </p:sp>
+      <p:sp>
+        <p:nvSpPr>
+          <p:cNvPr id="4" name="TextBox 3"/>
+          <p:cNvSpPr txBox="1"/>
+          <p:nvPr/>
+        </p:nvSpPr>
+        <p:spPr>
+          <a:xfrm>
+            <a:off x="475488" y="877824"/>
+            <a:ext cx="8229600" cy="310896"/>
+          </a:xfrm>
+          <a:prstGeom prst="rect">
+            <a:avLst/>
+          </a:prstGeom>
+          <a:noFill/>
+        </p:spPr>
+        <p:txBody>
+          <a:bodyPr wrap="square" lIns="0" rIns="0" tIns="0" bIns="0" anchor="t">
+            <a:spAutoFit/>
+          </a:bodyPr>
+          <a:lstStyle/>
+          <a:p>
+            <a:pPr algn="l" eaLnBrk="0">
+              <a:lnSpc>
+                <a:spcPct val="95000"/>
+              </a:lnSpc>
+              <a:spcBef>
+                <a:spcPts val="0"/>
+              </a:spcBef>
+              <a:spcAft>
+                <a:spcPts val="0"/>
+              </a:spcAft>
+              <a:buNone/>
+            </a:pPr>
+            <a:r>
+              <a:rPr sz="2100" b="0" i="0" lang="ko-KR" altLang="en-US">
+                <a:solidFill>
+                  <a:srgbClr val="595959"/>
+                </a:solidFill>
+                <a:latin typeface="맑은 고딕"/>
+                <a:ea typeface="맑은 고딕"/>
+                <a:cs typeface="맑은 고딕"/>
+              </a:rPr>
+              <a:t>Wb · T · G · Wb/cm</a:t>
+            </a:r>
+            <a:r>
+              <a:rPr sz="2100" b="0" i="0" baseline="30000" lang="ko-KR" altLang="en-US">
+                <a:solidFill>
+                  <a:srgbClr val="595959"/>
+                </a:solidFill>
+                <a:latin typeface="맑은 고딕"/>
+                <a:ea typeface="맑은 고딕"/>
+                <a:cs typeface="맑은 고딕"/>
+              </a:rPr>
+              <a:t>2</a:t>
+            </a:r>
+            <a:r>
+              <a:rPr sz="2100" b="0" i="0" lang="ko-KR" altLang="en-US">
+                <a:solidFill>
+                  <a:srgbClr val="595959"/>
+                </a:solidFill>
+                <a:latin typeface="맑은 고딕"/>
+                <a:ea typeface="맑은 고딕"/>
+                <a:cs typeface="맑은 고딕"/>
+              </a:rPr>
+              <a:t> · 예제 3-8(교재 130쪽)의 환산</a:t>
+            </a:r>
+          </a:p>
+        </p:txBody>
+      </p:sp>
+      <p:sp>
+        <p:nvSpPr>
+          <p:cNvPr id="10" name="Card 10"/>
+          <p:cNvSpPr/>
+          <p:nvPr/>
+        </p:nvSpPr>
+        <p:spPr>
+          <a:xfrm>
+            <a:off x="457200" y="1188720"/>
+            <a:ext cx="8229600" cy="1263014"/>
+          </a:xfrm>
+          <a:prstGeom prst="roundRect">
+            <a:avLst>
+              <a:gd name="adj" fmla="val 8000"/>
+            </a:avLst>
+          </a:prstGeom>
+          <a:solidFill>
+            <a:srgbClr val="F4F4F6"/>
+          </a:solidFill>
+          <a:ln>
+            <a:noFill/>
+          </a:ln>
+          <a:effectLst/>
+        </p:spPr>
+        <p:txBody>
+          <a:bodyPr rtlCol="0" anchor="ctr" wrap="square" lIns="54864" rIns="54864" tIns="27432" bIns="27432"/>
+          <a:lstStyle/>
+          <a:p>
+            <a:pPr algn="ctr"/>
+          </a:p>
+        </p:txBody>
+      </p:sp>
+      <p:sp>
+        <p:nvSpPr>
+          <p:cNvPr id="11" name="Oval 11"/>
+          <p:cNvSpPr/>
+          <p:nvPr/>
+        </p:nvSpPr>
+        <p:spPr>
+          <a:xfrm>
+            <a:off x="594360" y="1291849"/>
+            <a:ext cx="384048" cy="360950"/>
+          </a:xfrm>
+          <a:prstGeom prst="ellipse">
+            <a:avLst/>
+          </a:prstGeom>
+          <a:solidFill>
+            <a:srgbClr val="203864"/>
+          </a:solidFill>
+          <a:ln>
+            <a:noFill/>
+          </a:ln>
+          <a:effectLst/>
+        </p:spPr>
+        <p:txBody>
+          <a:bodyPr rtlCol="0" anchor="ctr" wrap="square" lIns="54864" rIns="54864" tIns="27432" bIns="27432"/>
+          <a:lstStyle/>
+          <a:p>
+            <a:pPr algn="ctr" eaLnBrk="0">
+              <a:lnSpc>
+                <a:spcPct val="95000"/>
+              </a:lnSpc>
+              <a:spcBef>
+                <a:spcPts val="0"/>
+              </a:spcBef>
+              <a:spcAft>
+                <a:spcPts val="0"/>
+              </a:spcAft>
+              <a:buNone/>
+            </a:pPr>
+            <a:r>
+              <a:rPr sz="2100" b="1" i="0" lang="ko-KR" altLang="en-US">
+                <a:solidFill>
+                  <a:srgbClr val="FFFFFF"/>
+                </a:solidFill>
+                <a:latin typeface="맑은 고딕"/>
+                <a:ea typeface="맑은 고딕"/>
+                <a:cs typeface="맑은 고딕"/>
+              </a:rPr>
+              <a:t>1</a:t>
+            </a:r>
+          </a:p>
+        </p:txBody>
+      </p:sp>
+      <p:sp>
+        <p:nvSpPr>
+          <p:cNvPr id="12" name="TextBox 12"/>
+          <p:cNvSpPr txBox="1"/>
+          <p:nvPr/>
+        </p:nvSpPr>
+        <p:spPr>
+          <a:xfrm>
+            <a:off x="1170432" y="1283255"/>
+            <a:ext cx="7296912" cy="1073944"/>
+          </a:xfrm>
+          <a:prstGeom prst="rect">
+            <a:avLst/>
+          </a:prstGeom>
+          <a:noFill/>
+        </p:spPr>
+        <p:txBody>
+          <a:bodyPr wrap="square" lIns="0" rIns="0" tIns="0" bIns="0" anchor="ctr">
+            <a:spAutoFit/>
+          </a:bodyPr>
+          <a:lstStyle/>
+          <a:p>
+            <a:pPr algn="l" eaLnBrk="0">
+              <a:lnSpc>
+                <a:spcPct val="95000"/>
+              </a:lnSpc>
+              <a:spcBef>
+                <a:spcPts val="0"/>
+              </a:spcBef>
+              <a:spcAft>
+                <a:spcPts val="200"/>
+              </a:spcAft>
+              <a:buNone/>
+            </a:pPr>
+            <a:r>
+              <a:rPr sz="2200" b="1" i="0" lang="ko-KR" altLang="en-US">
+                <a:solidFill>
+                  <a:srgbClr val="203864"/>
+                </a:solidFill>
+                <a:latin typeface="맑은 고딕"/>
+                <a:ea typeface="맑은 고딕"/>
+                <a:cs typeface="맑은 고딕"/>
+              </a:rPr>
+              <a:t>자속 Φ — 단위 Wb (웨버, weber)</a:t>
+            </a:r>
+          </a:p>
+          <a:p>
+            <a:pPr algn="l" eaLnBrk="0">
+              <a:lnSpc>
+                <a:spcPct val="95000"/>
+              </a:lnSpc>
+              <a:spcBef>
+                <a:spcPts val="0"/>
+              </a:spcBef>
+              <a:spcAft>
+                <a:spcPts val="100"/>
+              </a:spcAft>
+              <a:buNone/>
+            </a:pPr>
+            <a:r>
+              <a:rPr sz="2100" b="0" i="0" lang="ko-KR" altLang="en-US">
+                <a:solidFill>
+                  <a:srgbClr val="1A1A1A"/>
+                </a:solidFill>
+                <a:latin typeface="맑은 고딕"/>
+                <a:ea typeface="맑은 고딕"/>
+                <a:cs typeface="맑은 고딕"/>
+              </a:rPr>
+              <a:t>자기력선이 어떤 넓이를 꿰뚫는 총량</a:t>
+            </a:r>
+          </a:p>
+          <a:p>
+            <a:pPr algn="l" eaLnBrk="0">
+              <a:lnSpc>
+                <a:spcPct val="95000"/>
+              </a:lnSpc>
+              <a:spcBef>
+                <a:spcPts val="0"/>
+              </a:spcBef>
+              <a:spcAft>
+                <a:spcPts val="100"/>
+              </a:spcAft>
+              <a:buNone/>
+            </a:pPr>
+            <a:r>
+              <a:rPr sz="2100" b="0" i="0" lang="ko-KR" altLang="en-US">
+                <a:solidFill>
+                  <a:srgbClr val="1A1A1A"/>
+                </a:solidFill>
+                <a:latin typeface="맑은 고딕"/>
+                <a:ea typeface="맑은 고딕"/>
+                <a:cs typeface="맑은 고딕"/>
+              </a:rPr>
+              <a:t>1 Wb = 1 V·s — 1 초 만에 사라지면 1 V 를 만든다</a:t>
+            </a:r>
+          </a:p>
+        </p:txBody>
+      </p:sp>
+      <p:sp>
+        <p:nvSpPr>
+          <p:cNvPr id="13" name="Card 13"/>
+          <p:cNvSpPr/>
+          <p:nvPr/>
+        </p:nvSpPr>
+        <p:spPr>
+          <a:xfrm>
+            <a:off x="457200" y="2474595"/>
+            <a:ext cx="8229600" cy="1263014"/>
+          </a:xfrm>
+          <a:prstGeom prst="roundRect">
+            <a:avLst>
+              <a:gd name="adj" fmla="val 8000"/>
+            </a:avLst>
+          </a:prstGeom>
+          <a:solidFill>
+            <a:srgbClr val="F4F4F6"/>
+          </a:solidFill>
+          <a:ln>
+            <a:noFill/>
+          </a:ln>
+          <a:effectLst/>
+        </p:spPr>
+        <p:txBody>
+          <a:bodyPr rtlCol="0" anchor="ctr" wrap="square" lIns="54864" rIns="54864" tIns="27432" bIns="27432"/>
+          <a:lstStyle/>
+          <a:p>
+            <a:pPr algn="ctr"/>
+          </a:p>
+        </p:txBody>
+      </p:sp>
+      <p:sp>
+        <p:nvSpPr>
+          <p:cNvPr id="14" name="Oval 14"/>
+          <p:cNvSpPr/>
+          <p:nvPr/>
+        </p:nvSpPr>
+        <p:spPr>
+          <a:xfrm>
+            <a:off x="594360" y="2577724"/>
+            <a:ext cx="384048" cy="360950"/>
+          </a:xfrm>
+          <a:prstGeom prst="ellipse">
+            <a:avLst/>
+          </a:prstGeom>
+          <a:solidFill>
+            <a:srgbClr val="203864"/>
+          </a:solidFill>
+          <a:ln>
+            <a:noFill/>
+          </a:ln>
+          <a:effectLst/>
+        </p:spPr>
+        <p:txBody>
+          <a:bodyPr rtlCol="0" anchor="ctr" wrap="square" lIns="54864" rIns="54864" tIns="27432" bIns="27432"/>
+          <a:lstStyle/>
+          <a:p>
+            <a:pPr algn="ctr" eaLnBrk="0">
+              <a:lnSpc>
+                <a:spcPct val="95000"/>
+              </a:lnSpc>
+              <a:spcBef>
+                <a:spcPts val="0"/>
+              </a:spcBef>
+              <a:spcAft>
+                <a:spcPts val="0"/>
+              </a:spcAft>
+              <a:buNone/>
+            </a:pPr>
+            <a:r>
+              <a:rPr sz="2100" b="1" i="0" lang="ko-KR" altLang="en-US">
+                <a:solidFill>
+                  <a:srgbClr val="FFFFFF"/>
+                </a:solidFill>
+                <a:latin typeface="맑은 고딕"/>
+                <a:ea typeface="맑은 고딕"/>
+                <a:cs typeface="맑은 고딕"/>
+              </a:rPr>
+              <a:t>2</a:t>
+            </a:r>
+          </a:p>
+        </p:txBody>
+      </p:sp>
+      <p:sp>
+        <p:nvSpPr>
+          <p:cNvPr id="15" name="TextBox 15"/>
+          <p:cNvSpPr txBox="1"/>
+          <p:nvPr/>
+        </p:nvSpPr>
+        <p:spPr>
+          <a:xfrm>
+            <a:off x="1170432" y="2569130"/>
+            <a:ext cx="7296912" cy="1073944"/>
+          </a:xfrm>
+          <a:prstGeom prst="rect">
+            <a:avLst/>
+          </a:prstGeom>
+          <a:noFill/>
+        </p:spPr>
+        <p:txBody>
+          <a:bodyPr wrap="square" lIns="0" rIns="0" tIns="0" bIns="0" anchor="ctr">
+            <a:spAutoFit/>
+          </a:bodyPr>
+          <a:lstStyle/>
+          <a:p>
+            <a:pPr algn="l" eaLnBrk="0">
+              <a:lnSpc>
+                <a:spcPct val="95000"/>
+              </a:lnSpc>
+              <a:spcBef>
+                <a:spcPts val="0"/>
+              </a:spcBef>
+              <a:spcAft>
+                <a:spcPts val="200"/>
+              </a:spcAft>
+              <a:buNone/>
+            </a:pPr>
+            <a:r>
+              <a:rPr sz="2200" b="0" i="0" lang="ko-KR" altLang="en-US">
+                <a:solidFill>
+                  <a:srgbClr val="203864"/>
+                </a:solidFill>
+                <a:latin typeface="Cambria"/>
+                <a:ea typeface="Cambria"/>
+                <a:cs typeface="Cambria"/>
+              </a:rPr>
+              <a:t>𝓑</a:t>
+            </a:r>
+            <a:r>
+              <a:rPr sz="2200" b="1" i="0" lang="ko-KR" altLang="en-US">
+                <a:solidFill>
+                  <a:srgbClr val="203864"/>
+                </a:solidFill>
+                <a:latin typeface="맑은 고딕"/>
+                <a:ea typeface="맑은 고딕"/>
+                <a:cs typeface="맑은 고딕"/>
+              </a:rPr>
+              <a:t> — 자속밀도, 단위 Wb/m</a:t>
+            </a:r>
+            <a:r>
+              <a:rPr sz="2200" b="0" i="0" baseline="30000" lang="ko-KR" altLang="en-US">
+                <a:solidFill>
+                  <a:srgbClr val="203864"/>
+                </a:solidFill>
+                <a:latin typeface="맑은 고딕"/>
+                <a:ea typeface="맑은 고딕"/>
+                <a:cs typeface="맑은 고딕"/>
+              </a:rPr>
+              <a:t>2</a:t>
+            </a:r>
+            <a:r>
+              <a:rPr sz="2200" b="1" i="0" lang="ko-KR" altLang="en-US">
+                <a:solidFill>
+                  <a:srgbClr val="203864"/>
+                </a:solidFill>
+                <a:latin typeface="맑은 고딕"/>
+                <a:ea typeface="맑은 고딕"/>
+                <a:cs typeface="맑은 고딕"/>
+              </a:rPr>
+              <a:t> = T (테슬라)</a:t>
+            </a:r>
+          </a:p>
+          <a:p>
+            <a:pPr algn="l" eaLnBrk="0">
+              <a:lnSpc>
+                <a:spcPct val="95000"/>
+              </a:lnSpc>
+              <a:spcBef>
+                <a:spcPts val="0"/>
+              </a:spcBef>
+              <a:spcAft>
+                <a:spcPts val="100"/>
+              </a:spcAft>
+              <a:buNone/>
+            </a:pPr>
+            <a:r>
+              <a:rPr sz="2100" b="0" i="0" lang="ko-KR" altLang="en-US">
+                <a:solidFill>
+                  <a:srgbClr val="1A1A1A"/>
+                </a:solidFill>
+                <a:latin typeface="맑은 고딕"/>
+                <a:ea typeface="맑은 고딕"/>
+                <a:cs typeface="맑은 고딕"/>
+              </a:rPr>
+              <a:t>자속을 넓이로 나눈 값 — 홀 효과에 쓰는 것은 이쪽</a:t>
+            </a:r>
+          </a:p>
+          <a:p>
+            <a:pPr algn="l" eaLnBrk="0">
+              <a:lnSpc>
+                <a:spcPct val="95000"/>
+              </a:lnSpc>
+              <a:spcBef>
+                <a:spcPts val="0"/>
+              </a:spcBef>
+              <a:spcAft>
+                <a:spcPts val="100"/>
+              </a:spcAft>
+              <a:buNone/>
+            </a:pPr>
+            <a:r>
+              <a:rPr sz="2100" b="0" i="0" lang="ko-KR" altLang="en-US">
+                <a:solidFill>
+                  <a:srgbClr val="1A1A1A"/>
+                </a:solidFill>
+                <a:latin typeface="맑은 고딕"/>
+                <a:ea typeface="맑은 고딕"/>
+                <a:cs typeface="맑은 고딕"/>
+              </a:rPr>
+              <a:t>CGS 단위는 G (가우스, gauss) · 1 T = 10</a:t>
+            </a:r>
+            <a:r>
+              <a:rPr sz="2100" b="0" i="0" baseline="30000" lang="ko-KR" altLang="en-US">
+                <a:solidFill>
+                  <a:srgbClr val="1A1A1A"/>
+                </a:solidFill>
+                <a:latin typeface="맑은 고딕"/>
+                <a:ea typeface="맑은 고딕"/>
+                <a:cs typeface="맑은 고딕"/>
+              </a:rPr>
+              <a:t>4</a:t>
+            </a:r>
+            <a:r>
+              <a:rPr sz="2100" b="0" i="0" lang="ko-KR" altLang="en-US">
+                <a:solidFill>
+                  <a:srgbClr val="1A1A1A"/>
+                </a:solidFill>
+                <a:latin typeface="맑은 고딕"/>
+                <a:ea typeface="맑은 고딕"/>
+                <a:cs typeface="맑은 고딕"/>
+              </a:rPr>
+              <a:t> G</a:t>
+            </a:r>
+          </a:p>
+        </p:txBody>
+      </p:sp>
+      <p:sp>
+        <p:nvSpPr>
+          <p:cNvPr id="16" name="Card 16"/>
+          <p:cNvSpPr/>
+          <p:nvPr/>
+        </p:nvSpPr>
+        <p:spPr>
+          <a:xfrm>
+            <a:off x="457200" y="3760470"/>
+            <a:ext cx="8229600" cy="1263014"/>
+          </a:xfrm>
+          <a:prstGeom prst="roundRect">
+            <a:avLst>
+              <a:gd name="adj" fmla="val 8000"/>
+            </a:avLst>
+          </a:prstGeom>
+          <a:solidFill>
+            <a:srgbClr val="F4F4F6"/>
+          </a:solidFill>
+          <a:ln>
+            <a:noFill/>
+          </a:ln>
+          <a:effectLst/>
+        </p:spPr>
+        <p:txBody>
+          <a:bodyPr rtlCol="0" anchor="ctr" wrap="square" lIns="54864" rIns="54864" tIns="27432" bIns="27432"/>
+          <a:lstStyle/>
+          <a:p>
+            <a:pPr algn="ctr"/>
+          </a:p>
+        </p:txBody>
+      </p:sp>
+      <p:sp>
+        <p:nvSpPr>
+          <p:cNvPr id="17" name="Oval 17"/>
+          <p:cNvSpPr/>
+          <p:nvPr/>
+        </p:nvSpPr>
+        <p:spPr>
+          <a:xfrm>
+            <a:off x="594360" y="3863599"/>
+            <a:ext cx="384048" cy="360950"/>
+          </a:xfrm>
+          <a:prstGeom prst="ellipse">
+            <a:avLst/>
+          </a:prstGeom>
+          <a:solidFill>
+            <a:srgbClr val="203864"/>
+          </a:solidFill>
+          <a:ln>
+            <a:noFill/>
+          </a:ln>
+          <a:effectLst/>
+        </p:spPr>
+        <p:txBody>
+          <a:bodyPr rtlCol="0" anchor="ctr" wrap="square" lIns="54864" rIns="54864" tIns="27432" bIns="27432"/>
+          <a:lstStyle/>
+          <a:p>
+            <a:pPr algn="ctr" eaLnBrk="0">
+              <a:lnSpc>
+                <a:spcPct val="95000"/>
+              </a:lnSpc>
+              <a:spcBef>
+                <a:spcPts val="0"/>
+              </a:spcBef>
+              <a:spcAft>
+                <a:spcPts val="0"/>
+              </a:spcAft>
+              <a:buNone/>
+            </a:pPr>
+            <a:r>
+              <a:rPr sz="2100" b="1" i="0" lang="ko-KR" altLang="en-US">
+                <a:solidFill>
+                  <a:srgbClr val="FFFFFF"/>
+                </a:solidFill>
+                <a:latin typeface="맑은 고딕"/>
+                <a:ea typeface="맑은 고딕"/>
+                <a:cs typeface="맑은 고딕"/>
+              </a:rPr>
+              <a:t>3</a:t>
+            </a:r>
+          </a:p>
+        </p:txBody>
+      </p:sp>
+      <p:sp>
+        <p:nvSpPr>
+          <p:cNvPr id="18" name="TextBox 18"/>
+          <p:cNvSpPr txBox="1"/>
+          <p:nvPr/>
+        </p:nvSpPr>
+        <p:spPr>
+          <a:xfrm>
+            <a:off x="1170432" y="3855005"/>
+            <a:ext cx="7296912" cy="1073944"/>
+          </a:xfrm>
+          <a:prstGeom prst="rect">
+            <a:avLst/>
+          </a:prstGeom>
+          <a:noFill/>
+        </p:spPr>
+        <p:txBody>
+          <a:bodyPr wrap="square" lIns="0" rIns="0" tIns="0" bIns="0" anchor="ctr">
+            <a:spAutoFit/>
+          </a:bodyPr>
+          <a:lstStyle/>
+          <a:p>
+            <a:pPr algn="l" eaLnBrk="0">
+              <a:lnSpc>
+                <a:spcPct val="95000"/>
+              </a:lnSpc>
+              <a:spcBef>
+                <a:spcPts val="0"/>
+              </a:spcBef>
+              <a:spcAft>
+                <a:spcPts val="200"/>
+              </a:spcAft>
+              <a:buNone/>
+            </a:pPr>
+            <a:r>
+              <a:rPr sz="2200" b="1" i="0" lang="ko-KR" altLang="en-US">
+                <a:solidFill>
+                  <a:srgbClr val="203864"/>
+                </a:solidFill>
+                <a:latin typeface="맑은 고딕"/>
+                <a:ea typeface="맑은 고딕"/>
+                <a:cs typeface="맑은 고딕"/>
+              </a:rPr>
+              <a:t>교재가 쓰는 Wb/cm</a:t>
+            </a:r>
+            <a:r>
+              <a:rPr sz="2200" b="0" i="0" baseline="30000" lang="ko-KR" altLang="en-US">
+                <a:solidFill>
+                  <a:srgbClr val="203864"/>
+                </a:solidFill>
+                <a:latin typeface="맑은 고딕"/>
+                <a:ea typeface="맑은 고딕"/>
+                <a:cs typeface="맑은 고딕"/>
+              </a:rPr>
+              <a:t>2</a:t>
+            </a:r>
+          </a:p>
+          <a:p>
+            <a:pPr algn="l" eaLnBrk="0">
+              <a:lnSpc>
+                <a:spcPct val="95000"/>
+              </a:lnSpc>
+              <a:spcBef>
+                <a:spcPts val="0"/>
+              </a:spcBef>
+              <a:spcAft>
+                <a:spcPts val="100"/>
+              </a:spcAft>
+              <a:buNone/>
+            </a:pPr>
+            <a:r>
+              <a:rPr sz="2100" b="0" i="0" lang="ko-KR" altLang="en-US">
+                <a:solidFill>
+                  <a:srgbClr val="1A1A1A"/>
+                </a:solidFill>
+                <a:latin typeface="맑은 고딕"/>
+                <a:ea typeface="맑은 고딕"/>
+                <a:cs typeface="맑은 고딕"/>
+              </a:rPr>
+              <a:t>1 Wb/cm</a:t>
+            </a:r>
+            <a:r>
+              <a:rPr sz="2100" b="0" i="0" baseline="30000" lang="ko-KR" altLang="en-US">
+                <a:solidFill>
+                  <a:srgbClr val="1A1A1A"/>
+                </a:solidFill>
+                <a:latin typeface="맑은 고딕"/>
+                <a:ea typeface="맑은 고딕"/>
+                <a:cs typeface="맑은 고딕"/>
+              </a:rPr>
+              <a:t>2</a:t>
+            </a:r>
+            <a:r>
+              <a:rPr sz="2100" b="0" i="0" lang="ko-KR" altLang="en-US">
+                <a:solidFill>
+                  <a:srgbClr val="1A1A1A"/>
+                </a:solidFill>
+                <a:latin typeface="맑은 고딕"/>
+                <a:ea typeface="맑은 고딕"/>
+                <a:cs typeface="맑은 고딕"/>
+              </a:rPr>
+              <a:t> = 10</a:t>
+            </a:r>
+            <a:r>
+              <a:rPr sz="2100" b="0" i="0" baseline="30000" lang="ko-KR" altLang="en-US">
+                <a:solidFill>
+                  <a:srgbClr val="1A1A1A"/>
+                </a:solidFill>
+                <a:latin typeface="맑은 고딕"/>
+                <a:ea typeface="맑은 고딕"/>
+                <a:cs typeface="맑은 고딕"/>
+              </a:rPr>
+              <a:t>4</a:t>
+            </a:r>
+            <a:r>
+              <a:rPr sz="2100" b="0" i="0" lang="ko-KR" altLang="en-US">
+                <a:solidFill>
+                  <a:srgbClr val="1A1A1A"/>
+                </a:solidFill>
+                <a:latin typeface="맑은 고딕"/>
+                <a:ea typeface="맑은 고딕"/>
+                <a:cs typeface="맑은 고딕"/>
+              </a:rPr>
+              <a:t> Wb/m</a:t>
+            </a:r>
+            <a:r>
+              <a:rPr sz="2100" b="0" i="0" baseline="30000" lang="ko-KR" altLang="en-US">
+                <a:solidFill>
+                  <a:srgbClr val="1A1A1A"/>
+                </a:solidFill>
+                <a:latin typeface="맑은 고딕"/>
+                <a:ea typeface="맑은 고딕"/>
+                <a:cs typeface="맑은 고딕"/>
+              </a:rPr>
+              <a:t>2</a:t>
+            </a:r>
+            <a:r>
+              <a:rPr sz="2100" b="0" i="0" lang="ko-KR" altLang="en-US">
+                <a:solidFill>
+                  <a:srgbClr val="1A1A1A"/>
+                </a:solidFill>
+                <a:latin typeface="맑은 고딕"/>
+                <a:ea typeface="맑은 고딕"/>
+                <a:cs typeface="맑은 고딕"/>
+              </a:rPr>
+              <a:t> = 10</a:t>
+            </a:r>
+            <a:r>
+              <a:rPr sz="2100" b="0" i="0" baseline="30000" lang="ko-KR" altLang="en-US">
+                <a:solidFill>
+                  <a:srgbClr val="1A1A1A"/>
+                </a:solidFill>
+                <a:latin typeface="맑은 고딕"/>
+                <a:ea typeface="맑은 고딕"/>
+                <a:cs typeface="맑은 고딕"/>
+              </a:rPr>
+              <a:t>4</a:t>
+            </a:r>
+            <a:r>
+              <a:rPr sz="2100" b="0" i="0" lang="ko-KR" altLang="en-US">
+                <a:solidFill>
+                  <a:srgbClr val="1A1A1A"/>
+                </a:solidFill>
+                <a:latin typeface="맑은 고딕"/>
+                <a:ea typeface="맑은 고딕"/>
+                <a:cs typeface="맑은 고딕"/>
+              </a:rPr>
+              <a:t> T</a:t>
+            </a:r>
+          </a:p>
+          <a:p>
+            <a:pPr algn="l" eaLnBrk="0">
+              <a:lnSpc>
+                <a:spcPct val="95000"/>
+              </a:lnSpc>
+              <a:spcBef>
+                <a:spcPts val="0"/>
+              </a:spcBef>
+              <a:spcAft>
+                <a:spcPts val="100"/>
+              </a:spcAft>
+              <a:buNone/>
+            </a:pPr>
+            <a:r>
+              <a:rPr sz="2100" b="0" i="0" lang="ko-KR" altLang="en-US">
+                <a:solidFill>
+                  <a:srgbClr val="1A1A1A"/>
+                </a:solidFill>
+                <a:latin typeface="맑은 고딕"/>
+                <a:ea typeface="맑은 고딕"/>
+                <a:cs typeface="맑은 고딕"/>
+              </a:rPr>
+              <a:t>1 kG = 10</a:t>
+            </a:r>
+            <a:r>
+              <a:rPr sz="2100" b="0" i="0" baseline="30000" lang="ko-KR" altLang="en-US">
+                <a:solidFill>
+                  <a:srgbClr val="1A1A1A"/>
+                </a:solidFill>
+                <a:latin typeface="맑은 고딕"/>
+                <a:ea typeface="맑은 고딕"/>
+                <a:cs typeface="맑은 고딕"/>
+              </a:rPr>
+              <a:t>3</a:t>
+            </a:r>
+            <a:r>
+              <a:rPr sz="2100" b="0" i="0" lang="ko-KR" altLang="en-US">
+                <a:solidFill>
+                  <a:srgbClr val="1A1A1A"/>
+                </a:solidFill>
+                <a:latin typeface="맑은 고딕"/>
+                <a:ea typeface="맑은 고딕"/>
+                <a:cs typeface="맑은 고딕"/>
+              </a:rPr>
+              <a:t> G = 0.1 T = 10</a:t>
+            </a:r>
+            <a:r>
+              <a:rPr sz="2100" b="0" i="0" baseline="30000" lang="ko-KR" altLang="en-US">
+                <a:solidFill>
+                  <a:srgbClr val="1A1A1A"/>
+                </a:solidFill>
+                <a:latin typeface="맑은 고딕"/>
+                <a:ea typeface="맑은 고딕"/>
+                <a:cs typeface="맑은 고딕"/>
+              </a:rPr>
+              <a:t>-5</a:t>
+            </a:r>
+            <a:r>
+              <a:rPr sz="2100" b="0" i="0" lang="ko-KR" altLang="en-US">
+                <a:solidFill>
+                  <a:srgbClr val="1A1A1A"/>
+                </a:solidFill>
+                <a:latin typeface="맑은 고딕"/>
+                <a:ea typeface="맑은 고딕"/>
+                <a:cs typeface="맑은 고딕"/>
+              </a:rPr>
+              <a:t> Wb/cm</a:t>
+            </a:r>
+            <a:r>
+              <a:rPr sz="2100" b="0" i="0" baseline="30000" lang="ko-KR" altLang="en-US">
+                <a:solidFill>
+                  <a:srgbClr val="1A1A1A"/>
+                </a:solidFill>
+                <a:latin typeface="맑은 고딕"/>
+                <a:ea typeface="맑은 고딕"/>
+                <a:cs typeface="맑은 고딕"/>
+              </a:rPr>
+              <a:t>2</a:t>
+            </a:r>
+            <a:r>
+              <a:rPr sz="2100" b="0" i="0" lang="ko-KR" altLang="en-US">
+                <a:solidFill>
+                  <a:srgbClr val="1A1A1A"/>
+                </a:solidFill>
+                <a:latin typeface="맑은 고딕"/>
+                <a:ea typeface="맑은 고딕"/>
+                <a:cs typeface="맑은 고딕"/>
+              </a:rPr>
+              <a:t> — 교재 130쪽</a:t>
+            </a:r>
+          </a:p>
+        </p:txBody>
+      </p:sp>
+      <p:sp>
+        <p:nvSpPr>
+          <p:cNvPr id="19" name="Card 19"/>
+          <p:cNvSpPr/>
+          <p:nvPr/>
+        </p:nvSpPr>
+        <p:spPr>
+          <a:xfrm>
+            <a:off x="457200" y="5046345"/>
+            <a:ext cx="8229600" cy="1263014"/>
+          </a:xfrm>
+          <a:prstGeom prst="roundRect">
+            <a:avLst>
+              <a:gd name="adj" fmla="val 8000"/>
+            </a:avLst>
+          </a:prstGeom>
+          <a:solidFill>
+            <a:srgbClr val="F4F4F6"/>
+          </a:solidFill>
+          <a:ln>
+            <a:noFill/>
+          </a:ln>
+          <a:effectLst/>
+        </p:spPr>
+        <p:txBody>
+          <a:bodyPr rtlCol="0" anchor="ctr" wrap="square" lIns="54864" rIns="54864" tIns="27432" bIns="27432"/>
+          <a:lstStyle/>
+          <a:p>
+            <a:pPr algn="ctr"/>
+          </a:p>
+        </p:txBody>
+      </p:sp>
+      <p:sp>
+        <p:nvSpPr>
+          <p:cNvPr id="20" name="Oval 20"/>
+          <p:cNvSpPr/>
+          <p:nvPr/>
+        </p:nvSpPr>
+        <p:spPr>
+          <a:xfrm>
+            <a:off x="594360" y="5149474"/>
+            <a:ext cx="384048" cy="360950"/>
+          </a:xfrm>
+          <a:prstGeom prst="ellipse">
+            <a:avLst/>
+          </a:prstGeom>
+          <a:solidFill>
+            <a:srgbClr val="203864"/>
+          </a:solidFill>
+          <a:ln>
+            <a:noFill/>
+          </a:ln>
+          <a:effectLst/>
+        </p:spPr>
+        <p:txBody>
+          <a:bodyPr rtlCol="0" anchor="ctr" wrap="square" lIns="54864" rIns="54864" tIns="27432" bIns="27432"/>
+          <a:lstStyle/>
+          <a:p>
+            <a:pPr algn="ctr" eaLnBrk="0">
+              <a:lnSpc>
+                <a:spcPct val="95000"/>
+              </a:lnSpc>
+              <a:spcBef>
+                <a:spcPts val="0"/>
+              </a:spcBef>
+              <a:spcAft>
+                <a:spcPts val="0"/>
+              </a:spcAft>
+              <a:buNone/>
+            </a:pPr>
+            <a:r>
+              <a:rPr sz="2100" b="1" i="0" lang="ko-KR" altLang="en-US">
+                <a:solidFill>
+                  <a:srgbClr val="FFFFFF"/>
+                </a:solidFill>
+                <a:latin typeface="맑은 고딕"/>
+                <a:ea typeface="맑은 고딕"/>
+                <a:cs typeface="맑은 고딕"/>
+              </a:rPr>
+              <a:t>4</a:t>
+            </a:r>
+          </a:p>
+        </p:txBody>
+      </p:sp>
+      <p:sp>
+        <p:nvSpPr>
+          <p:cNvPr id="21" name="TextBox 21"/>
+          <p:cNvSpPr txBox="1"/>
+          <p:nvPr/>
+        </p:nvSpPr>
+        <p:spPr>
+          <a:xfrm>
+            <a:off x="1170432" y="5140880"/>
+            <a:ext cx="7296912" cy="1073944"/>
+          </a:xfrm>
+          <a:prstGeom prst="rect">
+            <a:avLst/>
+          </a:prstGeom>
+          <a:noFill/>
+        </p:spPr>
+        <p:txBody>
+          <a:bodyPr wrap="square" lIns="0" rIns="0" tIns="0" bIns="0" anchor="ctr">
+            <a:spAutoFit/>
+          </a:bodyPr>
+          <a:lstStyle/>
+          <a:p>
+            <a:pPr algn="l" eaLnBrk="0">
+              <a:lnSpc>
+                <a:spcPct val="95000"/>
+              </a:lnSpc>
+              <a:spcBef>
+                <a:spcPts val="0"/>
+              </a:spcBef>
+              <a:spcAft>
+                <a:spcPts val="200"/>
+              </a:spcAft>
+              <a:buNone/>
+            </a:pPr>
+            <a:r>
+              <a:rPr sz="2200" b="1" i="0" lang="ko-KR" altLang="en-US">
+                <a:solidFill>
+                  <a:srgbClr val="203864"/>
+                </a:solidFill>
+                <a:latin typeface="맑은 고딕"/>
+                <a:ea typeface="맑은 고딕"/>
+                <a:cs typeface="맑은 고딕"/>
+              </a:rPr>
+              <a:t>예제 3-8 에 넣는 꼴</a:t>
+            </a:r>
+          </a:p>
+          <a:p>
+            <a:pPr algn="l" eaLnBrk="0">
+              <a:lnSpc>
+                <a:spcPct val="95000"/>
+              </a:lnSpc>
+              <a:spcBef>
+                <a:spcPts val="0"/>
+              </a:spcBef>
+              <a:spcAft>
+                <a:spcPts val="100"/>
+              </a:spcAft>
+              <a:buNone/>
+            </a:pPr>
+            <a:r>
+              <a:rPr sz="2100" b="0" i="0" lang="ko-KR" altLang="en-US">
+                <a:solidFill>
+                  <a:srgbClr val="1A1A1A"/>
+                </a:solidFill>
+                <a:latin typeface="Cambria"/>
+                <a:ea typeface="Cambria"/>
+                <a:cs typeface="Cambria"/>
+              </a:rPr>
+              <a:t>𝓑</a:t>
+            </a:r>
+            <a:r>
+              <a:rPr sz="2100" b="0" i="0" lang="ko-KR" altLang="en-US">
+                <a:solidFill>
+                  <a:srgbClr val="1A1A1A"/>
+                </a:solidFill>
+                <a:latin typeface="맑은 고딕"/>
+                <a:ea typeface="맑은 고딕"/>
+                <a:cs typeface="맑은 고딕"/>
+              </a:rPr>
+              <a:t> = 10 kG = 1 T = 10</a:t>
+            </a:r>
+            <a:r>
+              <a:rPr sz="2100" b="0" i="0" baseline="30000" lang="ko-KR" altLang="en-US">
+                <a:solidFill>
+                  <a:srgbClr val="1A1A1A"/>
+                </a:solidFill>
+                <a:latin typeface="맑은 고딕"/>
+                <a:ea typeface="맑은 고딕"/>
+                <a:cs typeface="맑은 고딕"/>
+              </a:rPr>
+              <a:t>-4</a:t>
+            </a:r>
+            <a:r>
+              <a:rPr sz="2100" b="0" i="0" lang="ko-KR" altLang="en-US">
+                <a:solidFill>
+                  <a:srgbClr val="1A1A1A"/>
+                </a:solidFill>
+                <a:latin typeface="맑은 고딕"/>
+                <a:ea typeface="맑은 고딕"/>
+                <a:cs typeface="맑은 고딕"/>
+              </a:rPr>
+              <a:t> Wb/cm</a:t>
+            </a:r>
+            <a:r>
+              <a:rPr sz="2100" b="0" i="0" baseline="30000" lang="ko-KR" altLang="en-US">
+                <a:solidFill>
+                  <a:srgbClr val="1A1A1A"/>
+                </a:solidFill>
+                <a:latin typeface="맑은 고딕"/>
+                <a:ea typeface="맑은 고딕"/>
+                <a:cs typeface="맑은 고딕"/>
+              </a:rPr>
+              <a:t>2</a:t>
+            </a:r>
+          </a:p>
+          <a:p>
+            <a:pPr algn="l" eaLnBrk="0">
+              <a:lnSpc>
+                <a:spcPct val="95000"/>
+              </a:lnSpc>
+              <a:spcBef>
+                <a:spcPts val="0"/>
+              </a:spcBef>
+              <a:spcAft>
+                <a:spcPts val="100"/>
+              </a:spcAft>
+              <a:buNone/>
+            </a:pPr>
+            <a:r>
+              <a:rPr sz="2100" b="0" i="0" lang="ko-KR" altLang="en-US">
+                <a:solidFill>
+                  <a:srgbClr val="1A1A1A"/>
+                </a:solidFill>
+                <a:latin typeface="맑은 고딕"/>
+                <a:ea typeface="맑은 고딕"/>
+                <a:cs typeface="맑은 고딕"/>
+              </a:rPr>
+              <a:t>식 (3-50) 이 cm 계라 Wb/cm</a:t>
+            </a:r>
+            <a:r>
+              <a:rPr sz="2100" b="0" i="0" baseline="30000" lang="ko-KR" altLang="en-US">
+                <a:solidFill>
+                  <a:srgbClr val="1A1A1A"/>
+                </a:solidFill>
+                <a:latin typeface="맑은 고딕"/>
+                <a:ea typeface="맑은 고딕"/>
+                <a:cs typeface="맑은 고딕"/>
+              </a:rPr>
+              <a:t>2</a:t>
+            </a:r>
+            <a:r>
+              <a:rPr sz="2100" b="0" i="0" lang="ko-KR" altLang="en-US">
+                <a:solidFill>
+                  <a:srgbClr val="1A1A1A"/>
+                </a:solidFill>
+                <a:latin typeface="맑은 고딕"/>
+                <a:ea typeface="맑은 고딕"/>
+                <a:cs typeface="맑은 고딕"/>
+              </a:rPr>
+              <a:t> 로 맞춰 넣는다</a:t>
             </a:r>
           </a:p>
         </p:txBody>

--- a/물리전자공학_3장_4강_전계에서의_표동과_이동도.pptx
+++ b/물리전자공학_3장_4강_전계에서의_표동과_이동도.pptx
@@ -4779,7 +4779,7 @@
           <a:p>
             <a:r>
               <a:rPr lang="ko-KR" altLang="en-US"/>
-              <a:t>[보충] 사용자 요청 — 앞 장에서 말로 짚은 열전자를 이번에는 에너지가 들고 나는 그림으로 본다. 그림 읽는 법부터 — 가운데 막대가 전자의 평균 에너지(곧 T_e)이고, 왼쪽 가로 화살표가 전계에서 받는 몫 q𝓔v, 오른쪽 세로 화살표가 포논으로 격자에 버리는 몫이다. 화살표의 굵기가 그 몫의 크기다. 아래 회색 띠가 격자이고 늘 300 K 다. 세 걸음으로 읽는다. ① 약한 전계 — 전자가 전계에서 받는 일률은 q𝓔v 이고, 산란 때마다 음향 포논에 에너지를 조금씩 넘긴다. 받는 몫이 작아 받는 즉시 넘길 수 있으므로 전자의 평균 에너지는 (3/2)kT 를 거의 벗어나지 않는다 — 전자온도 T_e 가 격자온도 T_L = 300 K 와 같고, 이때 t̄ 가 전계와 무관해 μ 가 상수이며 v_d = μ𝓔(옴의 법칙)가 성립한다. ② 강전계 — 10^3 ~ 10^4 V/cm 를 넘으면 q𝓔v 가 커져 음향 포논으로 넘기는 몫을 앞지른다. 남는 에너지가 전자 쪽에 쌓여 분포가 통째로 달궈지고, 그 분포를 유효온도로 적으면 T_e ≫ T_L (강한 전계에서는 수천 K 급)이 된다. 격자는 여전히 300 K 이고 전자만 뜨겁다는 점이 '열전자' 라는 이름의 뜻이다. 에너지가 오르면 산란이 잦아져 t̄ 가 줄고, 그래서 μ 가 더 이상 상수가 아니라 전계의 함수가 된다 — 옴의 법칙이 깨지는 까닭이 여기에 있다. ③ 광학 포논이 뚜껑 — Si 의 광학 포논 에너지는 약 63 meV(ħω)로 상온 kT = 26 meV 의 두 배가 넘어 약한 전계에서는 거의 내보내지 못한다. 그러나 전자가 그만한 에너지를 모으는 순간부터는 광학 포논을 아주 빠르게(약 0.1 ps 간격) 내보내며 에너지를 통째로 격자에 버린다. 얻는 즉시 버리므로 평균 에너지가 더 오르지 못하고, 그래서 표동속도가 v_s 에서 멈춘다 — Si 전자 약 1×10^7, 정공 약 0.8×10^7 cm/s(그림 3-24). 교재가 포화속도를 평균 열적 속도(√(3kT/m*) = 2.3×10^7 cm/s)와 같은 자릿수라고 적는 것은 크기의 어림일 뿐이고, 멈추는 원인은 광학 포논 방출이다(산란제한속도, scattering limited velocity). 한 줄로 — 정상상태는 '얻는 몫 q𝓔v = 포논으로 잃는 몫' 이 비기는 자리이고, 전계가 셀수록 그 자리가 높아지다가 광학 포논이 열리는 높이에서 더 오르지 못한다. 다음 장에서 이 열전자가 소자에 무엇을 남기는지 본다.</a:t>
+              <a:t>[보충] 사용자 요청 — 앞 장에서 말로 짚은 열전자를 이번에는 에너지가 들고 나는 그림으로 본다. 그림 읽는 법부터 — 가운데 막대가 전자의 평균 에너지(곧 T_e)이고, 왼쪽 가로 화살표가 전계에서 받는 몫 q𝓔v, 오른쪽 세로 화살표가 포논으로 격자에 버리는 몫이다. 정상상태에서는 이 둘이 반드시 같으므로 두 화살표를 같은 굵기로 그렸고, 전계가 셀수록 둘이 함께 굵어진다 — 달라지는 것은 '균형이 맞춰지는 높이', 곧 막대의 높이다. 포논으로 버리는 빠르기가 전자가 뜨거울수록 커지기 때문에, 주는 몫이 커지면 더 높은 자리에서야 비긴다. 아래 회색 띠가 격자이고 늘 300 K 다. 세 걸음으로 읽는다. ① 약한 전계 — 전자가 전계에서 받는 일률은 q𝓔v 이고, 산란 때마다 음향 포논에 에너지를 조금씩 넘긴다. 받는 몫이 작아 받는 즉시 넘길 수 있으므로 전자의 평균 에너지는 (3/2)kT 를 거의 벗어나지 않는다 — 전자온도 T_e 가 격자온도 T_L = 300 K 와 같고, 이때 t̄ 가 전계와 무관해 μ 가 상수이며 v_d = μ𝓔(옴의 법칙)가 성립한다. ② 강전계 — 10^3 ~ 10^4 V/cm 를 넘으면 q𝓔v 가 커져 음향 포논으로 넘기는 몫을 앞지른다. 남는 에너지가 전자 쪽에 쌓여 분포가 통째로 달궈지고, 그 분포를 유효온도로 적으면 T_e ≫ T_L (강한 전계에서는 수천 K 급)이 된다. 격자는 여전히 300 K 이고 전자만 뜨겁다는 점이 '열전자' 라는 이름의 뜻이다. 에너지가 오르면 산란이 잦아져 t̄ 가 줄고, 그래서 μ 가 더 이상 상수가 아니라 전계의 함수가 된다 — 옴의 법칙이 깨지는 까닭이 여기에 있다. ③ 광학 포논이 뚜껑 — Si 의 광학 포논 에너지는 약 63 meV(ħω)로 상온 kT = 26 meV 의 두 배가 넘어 약한 전계에서는 거의 내보내지 못한다. 그러나 전자가 그만한 에너지를 모으는 순간부터는 광학 포논을 아주 빠르게(약 0.1 ps 간격) 내보내며 에너지를 통째로 격자에 버린다. 얻는 즉시 버리므로 평균 에너지가 더 오르지 못하고, 그래서 표동속도가 v_s 에서 멈춘다 — Si 전자 약 1×10^7, 정공 약 0.8×10^7 cm/s(그림 3-24). 교재가 포화속도를 평균 열적 속도(√(3kT/m*) = 2.3×10^7 cm/s)와 같은 자릿수라고 적는 것은 크기의 어림일 뿐이고, 멈추는 원인은 광학 포논 방출이다(산란제한속도, scattering limited velocity). 한 줄로 — 정상상태는 '얻는 몫 q𝓔v = 포논으로 잃는 몫' 이 비기는 자리이고, 전계가 셀수록 그 자리가 높아지다가 광학 포논이 열리는 높이에서 더 오르지 못한다. 다음 장에서 이 열전자가 소자에 무엇을 남기는지 본다.</a:t>
             </a:r>
           </a:p>
         </p:txBody>
@@ -5240,7 +5240,7 @@
           <a:p>
             <a:r>
               <a:rPr lang="ko-KR" altLang="en-US"/>
-              <a:t>[보충] 사용자 요청 — 예제 3-8 의 '1 kG = 10^-5 Wb/cm²' 가 어디서 왔는지 단위부터 정리한 장이다. ① 자속 Φ(magnetic flux)는 자기력선이 어떤 넓이를 꿰뚫는 총량이고 단위는 Wb(웨버)다. 1 Wb = 1 V·s 인 까닭은 패러데이 법칙 V = -dΦ/dt 때문이다 — 1 Wb 의 자속이 1 초 만에 사라지면 1 V 가 유도된다. ② 자속밀도 𝓑(magnetic flux density)는 그 자속을 넓이로 나눈 값으로 SI 단위가 Wb/m², 이것을 T(테슬라)라 부른다. 홀 효과의 로렌츠 힘 F = qv × 𝓑 에 들어가는 것은 Φ 가 아니라 𝓑 다. 교재와 자석 업계에서 흔히 쓰는 CGS 단위가 G(가우스)이고 1 T = 10^4 G 다. ③ 교재가 Wb/cm² 를 쓰는 까닭 — 반도체에서는 농도(cm^-3), 이동도(cm²/V·s), 길이(cm)를 모두 cm 계로 적으므로 자속밀도도 cm 계로 맞춰야 식 (3-50) 에 그대로 넣을 수 있다. 넓이가 m² → cm² 로 10^4 배 작아지므로 1 Wb/cm² = 10^4 Wb/m² = 10^4 T 이고, 거꾸로 1 kG = 0.1 T = 10^-5 Wb/cm² 가 된다. ④ 그래서 예제 3-8 의 𝓑 = 10 kG 는 1 T, 곧 10^-4 Wb/cm² 다. 단위 검산도 해 둘 것 — p_0 = I_x𝓑_z/(q t V_AB) 에서 [A][Wb/cm²] / ([C][cm][V]) 이고, A = C/s, Wb = V·s 이므로 분자가 (C/s)(V·s)/cm² = C·V/cm², 분모가 C·cm·V 라 결과가 cm^-3 으로 딱 떨어진다. 크기 감각 — 지구 자기장이 약 0.5 G(5×10^-5 T), 냉장고 자석이 약 50 mT(500 G), 병원 MRI 가 1.5~3 T 다. 예제의 10 kG = 1 T 는 실험실 전자석으로 낼 수 있는 꽤 센 자계다.</a:t>
+              <a:t>[보충] 사용자 요청 — 예제 3-8 의 '1 kG = 10^-5 Wb/cm²' 가 어디서 왔는지 단위부터 정리한 장이다. ① 자속 Φ(magnetic flux)는 자기력선이 어떤 넓이를 꿰뚫는 총량이고 단위는 Wb(웨버)다. 1 Wb = 1 V·s 인 까닭은 패러데이 법칙 V = -dΦ/dt 때문이다 — 1 Wb 의 자속이 1 초 만에 사라지면 1 V 가 유도된다. ② 자속밀도 𝓑(magnetic flux density)는 그 자속을 넓이로 나눈 값으로 SI 단위가 Wb/m², 이것을 T(테슬라)라 부른다. 홀 효과의 로렌츠 힘 F = qv × 𝓑 에 들어가는 것은 Φ 가 아니라 𝓑 다. 교재와 자석 업계에서 흔히 쓰는 CGS 단위가 G(가우스)이고 1 T = 10^4 G 다. ③ 교재가 Wb/cm² 를 쓰는 까닭 — 반도체에서는 농도(cm^-3), 이동도(cm²/V·s), 길이(cm)를 모두 cm 계로 적으므로 자속밀도도 cm 계로 맞춰야 식 (3-50) 에 그대로 넣을 수 있다. 넓이가 m² → cm² 로 10^4 배 작아지므로 1 Wb/cm² = 10^4 Wb/m² = 10^4 T 이고, 거꾸로 1 kG = 0.1 T = 10^-5 Wb/cm² 가 된다. ④ 그래서 예제 3-8 의 𝓑 = 10 kG 는 1 T, 곧 10^-4 Wb/cm² 다. 단위 검산도 해 둘 것 — p_0 = I_x𝓑_z/(q t V_AB) 에서 [A][Wb/cm²] / ([C][cm][V]) 이고, A = C/s, Wb = V·s 이므로 분자가 (C/s)(V·s)/cm² = C·V/cm², 분모가 C·cm·V 라 결과가 cm^-3 으로 딱 떨어진다. 크기 감각 — 지구 자기장이 약 0.5 G(5×10^-5 T), 냉장고 자석이 약 5 mT(50 G), 병원 MRI 가 1.5~3 T 다. 예제의 10 kG = 1 T 는 실험실 전자석으로 낼 수 있는 꽤 센 자계다.</a:t>
             </a:r>
           </a:p>
         </p:txBody>
@@ -48935,7 +48935,7 @@
       </p:sp>
       <p:sp>
         <p:nvSpPr>
-          <p:cNvPr id="19" name="TextBox 18"/>
+          <p:cNvPr id="22" name="TextBox 21"/>
           <p:cNvSpPr txBox="1"/>
           <p:nvPr/>
         </p:nvSpPr>
@@ -48983,7 +48983,7 @@
       </p:sp>
       <p:sp>
         <p:nvSpPr>
-          <p:cNvPr id="20" name="TextBox 19"/>
+          <p:cNvPr id="23" name="TextBox 22"/>
           <p:cNvSpPr txBox="1"/>
           <p:nvPr/>
         </p:nvSpPr>
@@ -49024,14 +49024,14 @@
                 <a:ea typeface="맑은 고딕"/>
                 <a:cs typeface="맑은 고딕"/>
               </a:rPr>
-              <a:t>열전자 열화</a:t>
-            </a:r>
-          </a:p>
-        </p:txBody>
-      </p:sp>
-      <p:sp>
-        <p:nvSpPr>
-          <p:cNvPr id="21" name="TextBox 20"/>
+              <a:t>열전자 주입</a:t>
+            </a:r>
+          </a:p>
+        </p:txBody>
+      </p:sp>
+      <p:sp>
+        <p:nvSpPr>
+          <p:cNvPr id="24" name="TextBox 23"/>
           <p:cNvSpPr txBox="1"/>
           <p:nvPr/>
         </p:nvSpPr>
@@ -53709,7 +53709,7 @@
                 <a:ea typeface="맑은 고딕"/>
                 <a:cs typeface="맑은 고딕"/>
               </a:rPr>
-              <a:t>받는 즉시 넘긴다</a:t>
+              <a:t>조금만 뜨거워도 비긴다</a:t>
             </a:r>
           </a:p>
         </p:txBody>
@@ -53880,7 +53880,7 @@
           <a:prstGeom prst="straightConnector1">
             <a:avLst/>
           </a:prstGeom>
-          <a:ln w="28575" cap="rnd">
+          <a:ln w="19050" cap="rnd">
             <a:solidFill>
               <a:srgbClr val="548235"/>
             </a:solidFill>
@@ -54061,7 +54061,7 @@
                 <a:ea typeface="맑은 고딕"/>
                 <a:cs typeface="맑은 고딕"/>
               </a:rPr>
-              <a:t>넘기지 못해 쌓인다</a:t>
+              <a:t>많이 뜨거워져야 비긴다</a:t>
             </a:r>
           </a:p>
         </p:txBody>
@@ -54162,7 +54162,7 @@
           <a:prstGeom prst="straightConnector1">
             <a:avLst/>
           </a:prstGeom>
-          <a:ln w="38100" cap="rnd">
+          <a:ln w="31750" cap="rnd">
             <a:solidFill>
               <a:srgbClr val="203864"/>
             </a:solidFill>
@@ -54232,7 +54232,7 @@
           <a:prstGeom prst="straightConnector1">
             <a:avLst/>
           </a:prstGeom>
-          <a:ln w="19050" cap="rnd">
+          <a:ln w="31750" cap="rnd">
             <a:solidFill>
               <a:srgbClr val="548235"/>
             </a:solidFill>
@@ -54413,7 +54413,7 @@
                 <a:ea typeface="맑은 고딕"/>
                 <a:cs typeface="맑은 고딕"/>
               </a:rPr>
-              <a:t>모이면 곧장 내보낸다</a:t>
+              <a:t>여기서부터 확 버린다</a:t>
             </a:r>
           </a:p>
         </p:txBody>
@@ -54514,7 +54514,7 @@
           <a:prstGeom prst="straightConnector1">
             <a:avLst/>
           </a:prstGeom>
-          <a:ln w="38100" cap="rnd">
+          <a:ln w="41275" cap="rnd">
             <a:solidFill>
               <a:srgbClr val="203864"/>
             </a:solidFill>
@@ -54584,7 +54584,7 @@
           <a:prstGeom prst="straightConnector1">
             <a:avLst/>
           </a:prstGeom>
-          <a:ln w="38100" cap="rnd">
+          <a:ln w="41275" cap="rnd">
             <a:solidFill>
               <a:srgbClr val="548235"/>
             </a:solidFill>
@@ -55071,7 +55071,7 @@
                 <a:ea typeface="맑은 고딕"/>
                 <a:cs typeface="맑은 고딕"/>
               </a:rPr>
-              <a:t>막대 = 전자의 평균 에너지 · 가로 화살표 = 전계가 주는 몫(q</a:t>
+              <a:t>막대 = 전자의 평균 에너지 · 화살표 = 주는 몫(q</a:t>
             </a:r>
             <a:r>
               <a:rPr sz="1400" b="0" i="0" lang="ko-KR" altLang="en-US">
@@ -55093,7 +55093,7 @@
                 <a:ea typeface="맑은 고딕"/>
                 <a:cs typeface="맑은 고딕"/>
               </a:rPr>
-              <a:t>v) · 세로 = 포논으로 버리는 몫</a:t>
+              <a:t>v)과 버리는 몫 — 정상상태에선 둘이 같다</a:t>
             </a:r>
           </a:p>
         </p:txBody>
@@ -55146,7 +55146,7 @@
                 <a:ea typeface="맑은 고딕"/>
                 <a:cs typeface="맑은 고딕"/>
               </a:rPr>
-              <a:t>전계가 주는 몫 &gt; 포논으로 버리는 몫 이면 에너지가 쌓임</a:t>
+              <a:t>포논으로 버리는 빠르기는 전자가 뜨거울수록 커진다</a:t>
             </a:r>
           </a:p>
           <a:p>
@@ -55176,7 +55176,7 @@
                 <a:ea typeface="맑은 고딕"/>
                 <a:cs typeface="맑은 고딕"/>
               </a:rPr>
-              <a:t>쌓인 만큼 전자만 뜨거워짐 — </a:t>
+              <a:t>전계가 세면 더 뜨거워져야 주는 몫과 비긴다 — </a:t>
             </a:r>
             <a:r>
               <a:rPr sz="2200" b="0" i="0" lang="ko-KR" altLang="en-US">
@@ -55250,7 +55250,7 @@
                 <a:ea typeface="맑은 고딕"/>
                 <a:cs typeface="맑은 고딕"/>
               </a:rPr>
-              <a:t>광학 포논이 열리면 더 못 뜨거워짐 → 속도 포화</a:t>
+              <a:t>광학 포논이 열리면 조금만 더 올라도 비김 → 속도 포화</a:t>
             </a:r>
           </a:p>
         </p:txBody>
@@ -57607,7 +57607,7 @@
                 <a:ea typeface="맑은 고딕"/>
                 <a:cs typeface="맑은 고딕"/>
               </a:rPr>
-              <a:t> — 결정이 떠는 정도. 전계를 걸어도 300 K 그대로다</a:t>
+              <a:t> — 결정이 떠는 정도. 전계를 걸어도 거의 그대로다</a:t>
             </a:r>
           </a:p>
           <a:p>
@@ -58256,7 +58256,7 @@
         <p:spPr>
           <a:xfrm>
             <a:off x="6375787" y="2391609"/>
-            <a:ext cx="1700000" cy="330000"/>
+            <a:ext cx="1900000" cy="330000"/>
           </a:xfrm>
           <a:prstGeom prst="rect">
             <a:avLst/>
@@ -58485,7 +58485,7 @@
         <p:spPr>
           <a:xfrm>
             <a:off x="6375787" y="4106109"/>
-            <a:ext cx="1700000" cy="330000"/>
+            <a:ext cx="1900000" cy="330000"/>
           </a:xfrm>
           <a:prstGeom prst="rect">
             <a:avLst/>
@@ -58714,7 +58714,7 @@
         <p:spPr>
           <a:xfrm>
             <a:off x="5418187" y="5820609"/>
-            <a:ext cx="1700000" cy="330000"/>
+            <a:ext cx="1900000" cy="330000"/>
           </a:xfrm>
           <a:prstGeom prst="rect">
             <a:avLst/>
@@ -59201,7 +59201,7 @@
         <p:spPr>
           <a:xfrm>
             <a:off x="5528387" y="2391609"/>
-            <a:ext cx="1700000" cy="330000"/>
+            <a:ext cx="1900000" cy="330000"/>
           </a:xfrm>
           <a:prstGeom prst="rect">
             <a:avLst/>
@@ -59430,7 +59430,7 @@
         <p:spPr>
           <a:xfrm>
             <a:off x="6010987" y="4106109"/>
-            <a:ext cx="1700000" cy="330000"/>
+            <a:ext cx="1900000" cy="330000"/>
           </a:xfrm>
           <a:prstGeom prst="rect">
             <a:avLst/>
@@ -59703,7 +59703,7 @@
         <p:spPr>
           <a:xfrm>
             <a:off x="4330387" y="5684359"/>
-            <a:ext cx="1700000" cy="330000"/>
+            <a:ext cx="1900000" cy="330000"/>
           </a:xfrm>
           <a:prstGeom prst="rect">
             <a:avLst/>
